--- a/재정학/01_Lectures/재정학_Chapter_3.pptx
+++ b/재정학/01_Lectures/재정학_Chapter_3.pptx
@@ -5,7 +5,7 @@
     <p:sldMasterId id="2147483648" r:id="rId1"/>
   </p:sldMasterIdLst>
   <p:notesMasterIdLst>
-    <p:notesMasterId r:id="rId38"/>
+    <p:notesMasterId r:id="rId37"/>
   </p:notesMasterIdLst>
   <p:sldIdLst>
     <p:sldId id="375" r:id="rId2"/>
@@ -26,24 +26,23 @@
     <p:sldId id="566" r:id="rId17"/>
     <p:sldId id="554" r:id="rId18"/>
     <p:sldId id="567" r:id="rId19"/>
-    <p:sldId id="568" r:id="rId20"/>
-    <p:sldId id="570" r:id="rId21"/>
-    <p:sldId id="569" r:id="rId22"/>
-    <p:sldId id="571" r:id="rId23"/>
-    <p:sldId id="572" r:id="rId24"/>
-    <p:sldId id="573" r:id="rId25"/>
-    <p:sldId id="575" r:id="rId26"/>
-    <p:sldId id="555" r:id="rId27"/>
-    <p:sldId id="576" r:id="rId28"/>
-    <p:sldId id="577" r:id="rId29"/>
-    <p:sldId id="578" r:id="rId30"/>
-    <p:sldId id="579" r:id="rId31"/>
-    <p:sldId id="580" r:id="rId32"/>
-    <p:sldId id="581" r:id="rId33"/>
-    <p:sldId id="582" r:id="rId34"/>
-    <p:sldId id="556" r:id="rId35"/>
-    <p:sldId id="583" r:id="rId36"/>
-    <p:sldId id="364" r:id="rId37"/>
+    <p:sldId id="570" r:id="rId20"/>
+    <p:sldId id="569" r:id="rId21"/>
+    <p:sldId id="571" r:id="rId22"/>
+    <p:sldId id="572" r:id="rId23"/>
+    <p:sldId id="573" r:id="rId24"/>
+    <p:sldId id="575" r:id="rId25"/>
+    <p:sldId id="555" r:id="rId26"/>
+    <p:sldId id="576" r:id="rId27"/>
+    <p:sldId id="577" r:id="rId28"/>
+    <p:sldId id="578" r:id="rId29"/>
+    <p:sldId id="579" r:id="rId30"/>
+    <p:sldId id="580" r:id="rId31"/>
+    <p:sldId id="581" r:id="rId32"/>
+    <p:sldId id="582" r:id="rId33"/>
+    <p:sldId id="556" r:id="rId34"/>
+    <p:sldId id="583" r:id="rId35"/>
+    <p:sldId id="364" r:id="rId36"/>
   </p:sldIdLst>
   <p:sldSz cx="12192000" cy="6858000"/>
   <p:notesSz cx="6858000" cy="9144000"/>
@@ -254,7 +253,7 @@
           <a:p>
             <a:fld id="{4A5E00EF-AEA4-43E2-9451-8F9C59A39471}" type="datetimeFigureOut">
               <a:rPr lang="ko-KR" altLang="en-US" smtClean="0"/>
-              <a:t>2026-02-20</a:t>
+              <a:t>2026-03-20</a:t>
             </a:fld>
             <a:endParaRPr lang="ko-KR" altLang="en-US"/>
           </a:p>
@@ -676,7 +675,7 @@
           <a:p>
             <a:fld id="{CD32C56F-BD27-4999-9E6D-D4EACE3DA9F4}" type="datetime1">
               <a:rPr lang="ko-KR" altLang="en-US" smtClean="0"/>
-              <a:t>2026-02-20</a:t>
+              <a:t>2026-03-20</a:t>
             </a:fld>
             <a:endParaRPr lang="ko-KR" altLang="en-US"/>
           </a:p>
@@ -890,7 +889,7 @@
           <a:p>
             <a:fld id="{8EF4A19C-72C8-45CA-8E3F-68A7FA345D6C}" type="datetime1">
               <a:rPr lang="ko-KR" altLang="en-US" smtClean="0"/>
-              <a:t>2026-02-20</a:t>
+              <a:t>2026-03-20</a:t>
             </a:fld>
             <a:endParaRPr lang="ko-KR" altLang="en-US"/>
           </a:p>
@@ -1114,7 +1113,7 @@
           <a:p>
             <a:fld id="{56A175B2-010B-4341-954C-5F8F5C70B124}" type="datetime1">
               <a:rPr lang="ko-KR" altLang="en-US" smtClean="0"/>
-              <a:t>2026-02-20</a:t>
+              <a:t>2026-03-20</a:t>
             </a:fld>
             <a:endParaRPr lang="ko-KR" altLang="en-US"/>
           </a:p>
@@ -1328,7 +1327,7 @@
           <a:p>
             <a:fld id="{16B83F9E-22C9-45CA-9E85-070F1D3EF530}" type="datetime1">
               <a:rPr lang="ko-KR" altLang="en-US" smtClean="0"/>
-              <a:t>2026-02-20</a:t>
+              <a:t>2026-03-20</a:t>
             </a:fld>
             <a:endParaRPr lang="ko-KR" altLang="en-US"/>
           </a:p>
@@ -1619,7 +1618,7 @@
           <a:p>
             <a:fld id="{03278F45-FB3C-4C4D-B89A-7BC3F5F229F6}" type="datetime1">
               <a:rPr lang="ko-KR" altLang="en-US" smtClean="0"/>
-              <a:t>2026-02-20</a:t>
+              <a:t>2026-03-20</a:t>
             </a:fld>
             <a:endParaRPr lang="ko-KR" altLang="en-US"/>
           </a:p>
@@ -2012,7 +2011,7 @@
           <a:p>
             <a:fld id="{38FDAC3C-35A6-415C-9F03-738A6AC328B1}" type="datetime1">
               <a:rPr lang="ko-KR" altLang="en-US" smtClean="0"/>
-              <a:t>2026-02-20</a:t>
+              <a:t>2026-03-20</a:t>
             </a:fld>
             <a:endParaRPr lang="ko-KR" altLang="en-US"/>
           </a:p>
@@ -3606,7 +3605,7 @@
           <a:p>
             <a:fld id="{507A0DF1-AEE6-4B0D-89D2-351E7B3EF65C}" type="datetime1">
               <a:rPr lang="ko-KR" altLang="en-US" smtClean="0"/>
-              <a:t>2026-02-20</a:t>
+              <a:t>2026-03-20</a:t>
             </a:fld>
             <a:endParaRPr lang="ko-KR" altLang="en-US"/>
           </a:p>
@@ -4034,7 +4033,7 @@
           <a:p>
             <a:fld id="{CA93B8C9-630F-4D57-944D-04FD37CECCD3}" type="datetime1">
               <a:rPr lang="ko-KR" altLang="en-US" smtClean="0"/>
-              <a:t>2026-02-20</a:t>
+              <a:t>2026-03-20</a:t>
             </a:fld>
             <a:endParaRPr lang="ko-KR" altLang="en-US"/>
           </a:p>
@@ -4191,7 +4190,7 @@
           <a:p>
             <a:fld id="{E986165A-AC43-4902-9541-874ECD310BA3}" type="datetime1">
               <a:rPr lang="ko-KR" altLang="en-US" smtClean="0"/>
-              <a:t>2026-02-20</a:t>
+              <a:t>2026-03-20</a:t>
             </a:fld>
             <a:endParaRPr lang="ko-KR" altLang="en-US"/>
           </a:p>
@@ -4518,7 +4517,7 @@
           <a:p>
             <a:fld id="{47E6EE6D-2B0E-43A9-87A2-7354CDB998F4}" type="datetime1">
               <a:rPr lang="ko-KR" altLang="en-US" smtClean="0"/>
-              <a:t>2026-02-20</a:t>
+              <a:t>2026-03-20</a:t>
             </a:fld>
             <a:endParaRPr lang="ko-KR" altLang="en-US"/>
           </a:p>
@@ -4822,7 +4821,7 @@
           <a:p>
             <a:fld id="{5CC5944E-0BC8-4FAA-9F94-6B4B05834E10}" type="datetime1">
               <a:rPr lang="ko-KR" altLang="en-US" smtClean="0"/>
-              <a:t>2026-02-20</a:t>
+              <a:t>2026-03-20</a:t>
             </a:fld>
             <a:endParaRPr lang="ko-KR" altLang="en-US"/>
           </a:p>
@@ -7148,7 +7147,14 @@
                 <a:latin typeface="HY헤드라인M" panose="02030600000101010101" pitchFamily="18" charset="-127"/>
                 <a:ea typeface="HY헤드라인M" panose="02030600000101010101" pitchFamily="18" charset="-127"/>
               </a:rPr>
-              <a:t>Lecture - 2</a:t>
+              <a:t>Lecture </a:t>
+            </a:r>
+            <a:r>
+              <a:rPr lang="en-US" altLang="ko-KR" sz="2800">
+                <a:latin typeface="HY헤드라인M" panose="02030600000101010101" pitchFamily="18" charset="-127"/>
+                <a:ea typeface="HY헤드라인M" panose="02030600000101010101" pitchFamily="18" charset="-127"/>
+              </a:rPr>
+              <a:t>- 3</a:t>
             </a:r>
             <a:endParaRPr lang="ko-KR" altLang="en-US" sz="1700" dirty="0">
               <a:latin typeface="+mn-ea"/>
@@ -9550,15 +9556,7 @@
             </a:r>
             <a:r>
               <a:rPr lang="ko-KR" altLang="en-US" sz="1600" spc="-50" dirty="0"/>
-              <a:t>장기적인 관점에서 </a:t>
-            </a:r>
-            <a:r>
-              <a:rPr lang="ko-KR" altLang="en-US" sz="1600" spc="-50" dirty="0" err="1"/>
-              <a:t>볼때</a:t>
-            </a:r>
-            <a:r>
-              <a:rPr lang="ko-KR" altLang="en-US" sz="1600" spc="-50" dirty="0"/>
-              <a:t> 공평성과 효율성은 서로 상호보완적이 될 가능성이 크다</a:t>
+              <a:t>장기적인 관점에서 볼 때 공평성과 효율성은 서로 상호보완적이 될 가능성이 크다</a:t>
             </a:r>
             <a:r>
               <a:rPr lang="en-US" altLang="ko-KR" sz="1600" spc="-50" dirty="0"/>
@@ -9769,7 +9767,7 @@
           <a:p>
             <a:r>
               <a:rPr lang="ko-KR" altLang="en-US" dirty="0"/>
-              <a:t>공평성의 의미</a:t>
+              <a:t>보상의 원칙</a:t>
             </a:r>
           </a:p>
         </p:txBody>
@@ -10201,7 +10199,7 @@
         <p:cNvPr id="1" name="">
           <a:extLst>
             <a:ext uri="{FF2B5EF4-FFF2-40B4-BE49-F238E27FC236}">
-              <a16:creationId xmlns:a16="http://schemas.microsoft.com/office/drawing/2014/main" id="{A698764E-DE21-8177-A560-D1D976CA4F41}"/>
+              <a16:creationId xmlns:a16="http://schemas.microsoft.com/office/drawing/2014/main" id="{39EF4861-61EA-4E16-9253-6043784F6264}"/>
             </a:ext>
           </a:extLst>
         </p:cNvPr>
@@ -10221,7 +10219,7 @@
           <p:cNvPr id="2" name="제목 1">
             <a:extLst>
               <a:ext uri="{FF2B5EF4-FFF2-40B4-BE49-F238E27FC236}">
-                <a16:creationId xmlns:a16="http://schemas.microsoft.com/office/drawing/2014/main" id="{BF6B9C70-1F1E-1D43-4259-8B1A8F9A7DE8}"/>
+                <a16:creationId xmlns:a16="http://schemas.microsoft.com/office/drawing/2014/main" id="{081923F1-DE4A-6E75-07C1-BC57F99BB123}"/>
               </a:ext>
             </a:extLst>
           </p:cNvPr>
@@ -10238,9 +10236,10 @@
           <a:lstStyle/>
           <a:p>
             <a:r>
-              <a:rPr lang="ko-KR" altLang="en-US" dirty="0"/>
-              <a:t>공평성의 의미</a:t>
-            </a:r>
+              <a:rPr lang="ko-KR" altLang="en-US" dirty="0" err="1"/>
+              <a:t>파레토기준</a:t>
+            </a:r>
+            <a:endParaRPr lang="ko-KR" altLang="en-US" dirty="0"/>
           </a:p>
         </p:txBody>
       </p:sp>
@@ -10249,7 +10248,7 @@
           <p:cNvPr id="4" name="슬라이드 번호 개체 틀 3">
             <a:extLst>
               <a:ext uri="{FF2B5EF4-FFF2-40B4-BE49-F238E27FC236}">
-                <a16:creationId xmlns:a16="http://schemas.microsoft.com/office/drawing/2014/main" id="{D11C94AB-83CD-6A54-8D9B-E8B8B6AE9575}"/>
+                <a16:creationId xmlns:a16="http://schemas.microsoft.com/office/drawing/2014/main" id="{080DE975-E843-5169-492A-80F9FEEF5A87}"/>
               </a:ext>
             </a:extLst>
           </p:cNvPr>
@@ -10273,12 +10272,580 @@
           </a:p>
         </p:txBody>
       </p:sp>
+      <mc:AlternateContent xmlns:mc="http://schemas.openxmlformats.org/markup-compatibility/2006" xmlns:a14="http://schemas.microsoft.com/office/drawing/2010/main">
+        <mc:Choice Requires="a14">
+          <p:sp>
+            <p:nvSpPr>
+              <p:cNvPr id="3" name="TextBox 2">
+                <a:extLst>
+                  <a:ext uri="{FF2B5EF4-FFF2-40B4-BE49-F238E27FC236}">
+                    <a16:creationId xmlns:a16="http://schemas.microsoft.com/office/drawing/2014/main" id="{2C45CFC6-B38B-31BA-76D4-7958D336FA77}"/>
+                  </a:ext>
+                </a:extLst>
+              </p:cNvPr>
+              <p:cNvSpPr txBox="1"/>
+              <p:nvPr/>
+            </p:nvSpPr>
+            <p:spPr>
+              <a:xfrm>
+                <a:off x="288790" y="958844"/>
+                <a:ext cx="11693660" cy="3040512"/>
+              </a:xfrm>
+              <a:prstGeom prst="rect">
+                <a:avLst/>
+              </a:prstGeom>
+              <a:noFill/>
+            </p:spPr>
+            <p:txBody>
+              <a:bodyPr wrap="square" rtlCol="0" anchor="t">
+                <a:spAutoFit/>
+              </a:bodyPr>
+              <a:lstStyle/>
+              <a:p>
+                <a:pPr marL="377825" indent="-285750">
+                  <a:lnSpc>
+                    <a:spcPct val="150000"/>
+                  </a:lnSpc>
+                  <a:buFont typeface="Arial" panose="020B0604020202020204" pitchFamily="34" charset="0"/>
+                  <a:buChar char="•"/>
+                </a:pPr>
+                <a:r>
+                  <a:rPr lang="ko-KR" altLang="en-US" sz="1600" spc="-50" dirty="0"/>
+                  <a:t>아래 그림에 표현되어 있듯이</a:t>
+                </a:r>
+                <a:r>
+                  <a:rPr lang="en-US" altLang="ko-KR" sz="1600" spc="-50" dirty="0"/>
+                  <a:t>, A</a:t>
+                </a:r>
+                <a:r>
+                  <a:rPr lang="ko-KR" altLang="en-US" sz="1600" spc="-50" dirty="0"/>
+                  <a:t>와 </a:t>
+                </a:r>
+                <a:r>
+                  <a:rPr lang="en-US" altLang="ko-KR" sz="1600" spc="-50" dirty="0"/>
+                  <a:t>B </a:t>
+                </a:r>
+                <a:r>
+                  <a:rPr lang="ko-KR" altLang="en-US" sz="1600" spc="-50" dirty="0"/>
+                  <a:t>두 사람이 사는 사회가</a:t>
+                </a:r>
+                <a:r>
+                  <a:rPr lang="en-US" altLang="ko-KR" sz="1600" spc="-50" dirty="0"/>
+                  <a:t> </a:t>
+                </a:r>
+                <a:r>
+                  <a:rPr lang="ko-KR" altLang="en-US" sz="1600" spc="-50" dirty="0"/>
+                  <a:t>있다</a:t>
+                </a:r>
+                <a:r>
+                  <a:rPr lang="en-US" altLang="ko-KR" sz="1600" spc="-50" dirty="0"/>
+                  <a:t>.</a:t>
+                </a:r>
+              </a:p>
+              <a:p>
+                <a:pPr marL="835025" lvl="1" indent="-285750">
+                  <a:lnSpc>
+                    <a:spcPct val="150000"/>
+                  </a:lnSpc>
+                  <a:buFont typeface="Wingdings" panose="05000000000000000000" pitchFamily="2" charset="2"/>
+                  <a:buChar char="ü"/>
+                </a:pPr>
+                <a:r>
+                  <a:rPr lang="ko-KR" altLang="en-US" sz="1600" spc="-50" dirty="0"/>
+                  <a:t>현재 두 사람의 효용수준은 </a:t>
+                </a:r>
+                <a14:m>
+                  <m:oMath xmlns:m="http://schemas.openxmlformats.org/officeDocument/2006/math">
+                    <m:r>
+                      <a:rPr lang="en-US" altLang="ko-KR" sz="1600" b="0" i="1" spc="-50" smtClean="0">
+                        <a:latin typeface="Cambria Math" panose="02040503050406030204" pitchFamily="18" charset="0"/>
+                      </a:rPr>
+                      <m:t>𝑆</m:t>
+                    </m:r>
+                  </m:oMath>
+                </a14:m>
+                <a:r>
+                  <a:rPr lang="ko-KR" altLang="en-US" sz="1600" spc="-50" dirty="0"/>
+                  <a:t>점에 있다</a:t>
+                </a:r>
+                <a:r>
+                  <a:rPr lang="en-US" altLang="ko-KR" sz="1600" spc="-50" dirty="0"/>
+                  <a:t>.</a:t>
+                </a:r>
+                <a:r>
+                  <a:rPr lang="ko-KR" altLang="en-US" sz="1600" spc="-50" dirty="0"/>
+                  <a:t> 즉 </a:t>
+                </a:r>
+                <a:r>
+                  <a:rPr lang="en-US" altLang="ko-KR" sz="1600" spc="-50" dirty="0"/>
+                  <a:t>A</a:t>
+                </a:r>
+                <a:r>
+                  <a:rPr lang="ko-KR" altLang="en-US" sz="1600" spc="-50" dirty="0"/>
+                  <a:t>는 </a:t>
+                </a:r>
+                <a14:m>
+                  <m:oMath xmlns:m="http://schemas.openxmlformats.org/officeDocument/2006/math">
+                    <m:sSub>
+                      <m:sSubPr>
+                        <m:ctrlPr>
+                          <a:rPr lang="en-US" altLang="ko-KR" sz="1600" i="1">
+                            <a:latin typeface="Cambria Math" panose="02040503050406030204" pitchFamily="18" charset="0"/>
+                          </a:rPr>
+                        </m:ctrlPr>
+                      </m:sSubPr>
+                      <m:e>
+                        <m:bar>
+                          <m:barPr>
+                            <m:pos m:val="top"/>
+                            <m:ctrlPr>
+                              <a:rPr lang="en-US" altLang="ko-KR" sz="1600" i="1">
+                                <a:latin typeface="Cambria Math" panose="02040503050406030204" pitchFamily="18" charset="0"/>
+                              </a:rPr>
+                            </m:ctrlPr>
+                          </m:barPr>
+                          <m:e>
+                            <m:r>
+                              <a:rPr lang="en-US" altLang="ko-KR" sz="1600" i="1">
+                                <a:latin typeface="Cambria Math" panose="02040503050406030204" pitchFamily="18" charset="0"/>
+                              </a:rPr>
+                              <m:t>𝑈</m:t>
+                            </m:r>
+                          </m:e>
+                        </m:bar>
+                      </m:e>
+                      <m:sub>
+                        <m:r>
+                          <a:rPr lang="en-US" altLang="ko-KR" sz="1600" i="1">
+                            <a:latin typeface="Cambria Math" panose="02040503050406030204" pitchFamily="18" charset="0"/>
+                          </a:rPr>
+                          <m:t>𝐴</m:t>
+                        </m:r>
+                      </m:sub>
+                    </m:sSub>
+                  </m:oMath>
+                </a14:m>
+                <a:r>
+                  <a:rPr lang="ko-KR" altLang="en-US" sz="1600" spc="-50" dirty="0"/>
+                  <a:t>의 효용수준을 갖고</a:t>
+                </a:r>
+                <a:r>
+                  <a:rPr lang="en-US" altLang="ko-KR" sz="1600" spc="-50" dirty="0"/>
+                  <a:t>, B</a:t>
+                </a:r>
+                <a:r>
+                  <a:rPr lang="ko-KR" altLang="en-US" sz="1600" spc="-50" dirty="0"/>
+                  <a:t>는 </a:t>
+                </a:r>
+                <a14:m>
+                  <m:oMath xmlns:m="http://schemas.openxmlformats.org/officeDocument/2006/math">
+                    <m:sSub>
+                      <m:sSubPr>
+                        <m:ctrlPr>
+                          <a:rPr lang="en-US" altLang="ko-KR" sz="1600" i="1">
+                            <a:latin typeface="Cambria Math" panose="02040503050406030204" pitchFamily="18" charset="0"/>
+                          </a:rPr>
+                        </m:ctrlPr>
+                      </m:sSubPr>
+                      <m:e>
+                        <m:bar>
+                          <m:barPr>
+                            <m:pos m:val="top"/>
+                            <m:ctrlPr>
+                              <a:rPr lang="en-US" altLang="ko-KR" sz="1600" i="1">
+                                <a:latin typeface="Cambria Math" panose="02040503050406030204" pitchFamily="18" charset="0"/>
+                              </a:rPr>
+                            </m:ctrlPr>
+                          </m:barPr>
+                          <m:e>
+                            <m:r>
+                              <a:rPr lang="en-US" altLang="ko-KR" sz="1600" i="1">
+                                <a:latin typeface="Cambria Math" panose="02040503050406030204" pitchFamily="18" charset="0"/>
+                              </a:rPr>
+                              <m:t>𝑈</m:t>
+                            </m:r>
+                          </m:e>
+                        </m:bar>
+                      </m:e>
+                      <m:sub>
+                        <m:r>
+                          <a:rPr lang="en-US" altLang="ko-KR" sz="1600" b="0" i="1" smtClean="0">
+                            <a:latin typeface="Cambria Math" panose="02040503050406030204" pitchFamily="18" charset="0"/>
+                          </a:rPr>
+                          <m:t>𝐵</m:t>
+                        </m:r>
+                      </m:sub>
+                    </m:sSub>
+                  </m:oMath>
+                </a14:m>
+                <a:r>
+                  <a:rPr lang="ko-KR" altLang="en-US" sz="1600" spc="-50" dirty="0"/>
+                  <a:t>의 효용수준을 갖고 있다</a:t>
+                </a:r>
+                <a:r>
+                  <a:rPr lang="en-US" altLang="ko-KR" sz="1600" spc="-50" dirty="0"/>
+                  <a:t>.</a:t>
+                </a:r>
+              </a:p>
+              <a:p>
+                <a:pPr marL="377825" indent="-285750">
+                  <a:lnSpc>
+                    <a:spcPct val="150000"/>
+                  </a:lnSpc>
+                  <a:buFont typeface="Arial" panose="020B0604020202020204" pitchFamily="34" charset="0"/>
+                  <a:buChar char="•"/>
+                </a:pPr>
+                <a:r>
+                  <a:rPr lang="ko-KR" altLang="en-US" sz="1600" spc="-50" dirty="0"/>
+                  <a:t>어떤 이유에 의해 이 상태</a:t>
+                </a:r>
+                <a:r>
+                  <a:rPr lang="en-US" altLang="ko-KR" sz="1600" spc="-50" dirty="0"/>
+                  <a:t>(</a:t>
+                </a:r>
+                <a14:m>
+                  <m:oMath xmlns:m="http://schemas.openxmlformats.org/officeDocument/2006/math">
+                    <m:r>
+                      <a:rPr lang="en-US" altLang="ko-KR" sz="1600" i="1" spc="-50">
+                        <a:latin typeface="Cambria Math" panose="02040503050406030204" pitchFamily="18" charset="0"/>
+                      </a:rPr>
+                      <m:t>𝑆</m:t>
+                    </m:r>
+                  </m:oMath>
+                </a14:m>
+                <a:r>
+                  <a:rPr lang="ko-KR" altLang="en-US" sz="1600" spc="-50" dirty="0"/>
+                  <a:t>점</a:t>
+                </a:r>
+                <a:r>
+                  <a:rPr lang="en-US" altLang="ko-KR" sz="1600" spc="-50" dirty="0"/>
+                  <a:t>)</a:t>
+                </a:r>
+                <a:r>
+                  <a:rPr lang="ko-KR" altLang="en-US" sz="1600" spc="-50" dirty="0"/>
+                  <a:t>가 다른 것으로 변화하는 경우</a:t>
+                </a:r>
+                <a:r>
+                  <a:rPr lang="en-US" altLang="ko-KR" sz="1600" spc="-50" dirty="0"/>
+                  <a:t>, </a:t>
+                </a:r>
+                <a:r>
+                  <a:rPr lang="ko-KR" altLang="en-US" sz="1600" spc="-50" dirty="0"/>
+                  <a:t>사회적 관점에서 이를 개선이라고 평가할 수 있는지 알아보자</a:t>
+                </a:r>
+                <a:r>
+                  <a:rPr lang="en-US" altLang="ko-KR" sz="1600" spc="-50" dirty="0"/>
+                  <a:t>.</a:t>
+                </a:r>
+              </a:p>
+              <a:p>
+                <a:pPr marL="835025" lvl="1" indent="-285750">
+                  <a:lnSpc>
+                    <a:spcPct val="150000"/>
+                  </a:lnSpc>
+                  <a:buFont typeface="Wingdings" panose="05000000000000000000" pitchFamily="2" charset="2"/>
+                  <a:buChar char="ü"/>
+                </a:pPr>
+                <a:r>
+                  <a:rPr lang="ko-KR" altLang="en-US" sz="1600" b="1" spc="-50" dirty="0"/>
+                  <a:t>파레토 기준</a:t>
+                </a:r>
+                <a:r>
+                  <a:rPr lang="ko-KR" altLang="en-US" sz="1600" spc="-50" dirty="0"/>
+                  <a:t>이라는 평가 기준에서 개선은 새로운 상태에서 어떤 사람의 효용수준도 이전보다 감소하지 않았고</a:t>
+                </a:r>
+                <a:r>
+                  <a:rPr lang="en-US" altLang="ko-KR" sz="1600" spc="-50" dirty="0"/>
+                  <a:t>, </a:t>
+                </a:r>
+                <a:r>
+                  <a:rPr lang="ko-KR" altLang="en-US" sz="1600" spc="-50" dirty="0"/>
+                  <a:t>최소한 한 사람 이상의 효용이 증가한 경우를 의미한다</a:t>
+                </a:r>
+                <a:r>
+                  <a:rPr lang="en-US" altLang="ko-KR" sz="1600" spc="-50" dirty="0"/>
+                  <a:t>.</a:t>
+                </a:r>
+              </a:p>
+              <a:p>
+                <a:pPr marL="835025" lvl="1" indent="-285750">
+                  <a:lnSpc>
+                    <a:spcPct val="150000"/>
+                  </a:lnSpc>
+                  <a:buFont typeface="Wingdings" panose="05000000000000000000" pitchFamily="2" charset="2"/>
+                  <a:buChar char="ü"/>
+                </a:pPr>
+                <a:r>
+                  <a:rPr lang="ko-KR" altLang="en-US" sz="1600" spc="-50" dirty="0"/>
+                  <a:t>그림에서 </a:t>
+                </a:r>
+                <a14:m>
+                  <m:oMath xmlns:m="http://schemas.openxmlformats.org/officeDocument/2006/math">
+                    <m:r>
+                      <a:rPr lang="en-US" altLang="ko-KR" sz="1600" i="1" spc="-50">
+                        <a:latin typeface="Cambria Math" panose="02040503050406030204" pitchFamily="18" charset="0"/>
+                      </a:rPr>
+                      <m:t>𝑆</m:t>
+                    </m:r>
+                  </m:oMath>
+                </a14:m>
+                <a:r>
+                  <a:rPr lang="ko-KR" altLang="en-US" sz="1600" spc="-50" dirty="0"/>
+                  <a:t>점을 중심으로 오른쪽 위에 </a:t>
+                </a:r>
+                <a:r>
+                  <a:rPr lang="ko-KR" altLang="en-US" sz="1600" spc="-50" dirty="0" err="1"/>
+                  <a:t>노란구역으로의</a:t>
+                </a:r>
+                <a:r>
+                  <a:rPr lang="ko-KR" altLang="en-US" sz="1600" spc="-50" dirty="0"/>
+                  <a:t> 변화를 개선이라고 평가할 수 있다</a:t>
+                </a:r>
+                <a:r>
+                  <a:rPr lang="en-US" altLang="ko-KR" sz="1600" spc="-50" dirty="0"/>
+                  <a:t>.</a:t>
+                </a:r>
+              </a:p>
+              <a:p>
+                <a:pPr marL="1292225" lvl="2" indent="-285750">
+                  <a:lnSpc>
+                    <a:spcPct val="150000"/>
+                  </a:lnSpc>
+                  <a:buFont typeface="Wingdings" panose="05000000000000000000" pitchFamily="2" charset="2"/>
+                  <a:buChar char="Ø"/>
+                </a:pPr>
+                <a14:m>
+                  <m:oMath xmlns:m="http://schemas.openxmlformats.org/officeDocument/2006/math">
+                    <m:r>
+                      <a:rPr lang="en-US" altLang="ko-KR" sz="1600" i="1">
+                        <a:latin typeface="Cambria Math" panose="02040503050406030204" pitchFamily="18" charset="0"/>
+                      </a:rPr>
+                      <m:t>𝑆</m:t>
+                    </m:r>
+                    <m:r>
+                      <a:rPr lang="en-US" altLang="ko-KR" sz="1600" i="1">
+                        <a:latin typeface="Cambria Math" panose="02040503050406030204" pitchFamily="18" charset="0"/>
+                      </a:rPr>
+                      <m:t> </m:t>
+                    </m:r>
+                  </m:oMath>
+                </a14:m>
+                <a:r>
+                  <a:rPr lang="ko-KR" altLang="en-US" sz="1600" dirty="0"/>
+                  <a:t>점에서 </a:t>
+                </a:r>
+                <a14:m>
+                  <m:oMath xmlns:m="http://schemas.openxmlformats.org/officeDocument/2006/math">
+                    <m:sSup>
+                      <m:sSupPr>
+                        <m:ctrlPr>
+                          <a:rPr lang="en-US" altLang="ko-KR" sz="1600" i="1">
+                            <a:latin typeface="Cambria Math" panose="02040503050406030204" pitchFamily="18" charset="0"/>
+                          </a:rPr>
+                        </m:ctrlPr>
+                      </m:sSupPr>
+                      <m:e>
+                        <m:r>
+                          <a:rPr lang="en-US" altLang="ko-KR" sz="1600" i="1">
+                            <a:latin typeface="Cambria Math" panose="02040503050406030204" pitchFamily="18" charset="0"/>
+                          </a:rPr>
+                          <m:t>𝑆</m:t>
+                        </m:r>
+                      </m:e>
+                      <m:sup>
+                        <m:r>
+                          <a:rPr lang="en-US" altLang="ko-KR" sz="1600" i="1">
+                            <a:latin typeface="Cambria Math" panose="02040503050406030204" pitchFamily="18" charset="0"/>
+                          </a:rPr>
+                          <m:t>′</m:t>
+                        </m:r>
+                      </m:sup>
+                    </m:sSup>
+                  </m:oMath>
+                </a14:m>
+                <a:r>
+                  <a:rPr lang="en-US" altLang="ko-KR" sz="1600" dirty="0"/>
+                  <a:t>, </a:t>
+                </a:r>
+                <a14:m>
+                  <m:oMath xmlns:m="http://schemas.openxmlformats.org/officeDocument/2006/math">
+                    <m:sSup>
+                      <m:sSupPr>
+                        <m:ctrlPr>
+                          <a:rPr lang="en-US" altLang="ko-KR" sz="1600" i="1">
+                            <a:latin typeface="Cambria Math" panose="02040503050406030204" pitchFamily="18" charset="0"/>
+                          </a:rPr>
+                        </m:ctrlPr>
+                      </m:sSupPr>
+                      <m:e>
+                        <m:r>
+                          <a:rPr lang="en-US" altLang="ko-KR" sz="1600" i="1">
+                            <a:latin typeface="Cambria Math" panose="02040503050406030204" pitchFamily="18" charset="0"/>
+                          </a:rPr>
+                          <m:t>𝑆</m:t>
+                        </m:r>
+                      </m:e>
+                      <m:sup>
+                        <m:r>
+                          <a:rPr lang="en-US" altLang="ko-KR" sz="1600" i="1">
+                            <a:latin typeface="Cambria Math" panose="02040503050406030204" pitchFamily="18" charset="0"/>
+                          </a:rPr>
+                          <m:t>′</m:t>
+                        </m:r>
+                        <m:r>
+                          <a:rPr lang="en-US" altLang="ko-KR" sz="1600" b="0" i="1" smtClean="0">
+                            <a:latin typeface="Cambria Math" panose="02040503050406030204" pitchFamily="18" charset="0"/>
+                          </a:rPr>
+                          <m:t>′</m:t>
+                        </m:r>
+                      </m:sup>
+                    </m:sSup>
+                  </m:oMath>
+                </a14:m>
+                <a:r>
+                  <a:rPr lang="ko-KR" altLang="en-US" sz="1600" dirty="0"/>
+                  <a:t> 점으로의 변화는 개선으로 평가할 수 있고</a:t>
+                </a:r>
+                <a:r>
+                  <a:rPr lang="en-US" altLang="ko-KR" sz="1600" dirty="0"/>
+                  <a:t>, </a:t>
+                </a:r>
+                <a:r>
+                  <a:rPr lang="ko-KR" altLang="en-US" sz="1600" dirty="0" err="1"/>
+                  <a:t>노란구역</a:t>
+                </a:r>
+                <a:r>
+                  <a:rPr lang="ko-KR" altLang="en-US" sz="1600" dirty="0"/>
+                  <a:t> 바깥쪽에 있는 </a:t>
+                </a:r>
+                <a14:m>
+                  <m:oMath xmlns:m="http://schemas.openxmlformats.org/officeDocument/2006/math">
+                    <m:sSup>
+                      <m:sSupPr>
+                        <m:ctrlPr>
+                          <a:rPr lang="en-US" altLang="ko-KR" sz="1600" i="1">
+                            <a:latin typeface="Cambria Math" panose="02040503050406030204" pitchFamily="18" charset="0"/>
+                          </a:rPr>
+                        </m:ctrlPr>
+                      </m:sSupPr>
+                      <m:e>
+                        <m:r>
+                          <a:rPr lang="en-US" altLang="ko-KR" sz="1600" i="1">
+                            <a:latin typeface="Cambria Math" panose="02040503050406030204" pitchFamily="18" charset="0"/>
+                          </a:rPr>
+                          <m:t>𝑆</m:t>
+                        </m:r>
+                      </m:e>
+                      <m:sup>
+                        <m:r>
+                          <a:rPr lang="en-US" altLang="ko-KR" sz="1600" i="1">
+                            <a:latin typeface="Cambria Math" panose="02040503050406030204" pitchFamily="18" charset="0"/>
+                          </a:rPr>
+                          <m:t>′</m:t>
+                        </m:r>
+                        <m:r>
+                          <a:rPr lang="en-US" altLang="ko-KR" sz="1600" b="0" i="1" smtClean="0">
+                            <a:latin typeface="Cambria Math" panose="02040503050406030204" pitchFamily="18" charset="0"/>
+                          </a:rPr>
+                          <m:t>′′</m:t>
+                        </m:r>
+                      </m:sup>
+                    </m:sSup>
+                  </m:oMath>
+                </a14:m>
+                <a:r>
+                  <a:rPr lang="ko-KR" altLang="en-US" sz="1600" dirty="0"/>
+                  <a:t>으로의 변화는 개선인지 아닌지 알 수 없다고 평가할 수 있다</a:t>
+                </a:r>
+                <a:r>
+                  <a:rPr lang="en-US" altLang="ko-KR" sz="1600" dirty="0"/>
+                  <a:t>.</a:t>
+                </a:r>
+              </a:p>
+            </p:txBody>
+          </p:sp>
+        </mc:Choice>
+        <mc:Fallback xmlns="">
+          <p:sp>
+            <p:nvSpPr>
+              <p:cNvPr id="3" name="TextBox 2">
+                <a:extLst>
+                  <a:ext uri="{FF2B5EF4-FFF2-40B4-BE49-F238E27FC236}">
+                    <a16:creationId xmlns:a16="http://schemas.microsoft.com/office/drawing/2014/main" id="{2C45CFC6-B38B-31BA-76D4-7958D336FA77}"/>
+                  </a:ext>
+                </a:extLst>
+              </p:cNvPr>
+              <p:cNvSpPr txBox="1">
+                <a:spLocks noRot="1" noChangeAspect="1" noMove="1" noResize="1" noEditPoints="1" noAdjustHandles="1" noChangeArrowheads="1" noChangeShapeType="1" noTextEdit="1"/>
+              </p:cNvSpPr>
+              <p:nvPr/>
+            </p:nvSpPr>
+            <p:spPr>
+              <a:xfrm>
+                <a:off x="288790" y="958844"/>
+                <a:ext cx="11693660" cy="3040512"/>
+              </a:xfrm>
+              <a:prstGeom prst="rect">
+                <a:avLst/>
+              </a:prstGeom>
+              <a:blipFill>
+                <a:blip r:embed="rId2"/>
+                <a:stretch>
+                  <a:fillRect b="-1603"/>
+                </a:stretch>
+              </a:blipFill>
+            </p:spPr>
+            <p:txBody>
+              <a:bodyPr/>
+              <a:lstStyle/>
+              <a:p>
+                <a:r>
+                  <a:rPr lang="ko-KR" altLang="en-US">
+                    <a:noFill/>
+                  </a:rPr>
+                  <a:t> </a:t>
+                </a:r>
+              </a:p>
+            </p:txBody>
+          </p:sp>
+        </mc:Fallback>
+      </mc:AlternateContent>
+      <p:pic>
+        <p:nvPicPr>
+          <p:cNvPr id="8" name="그림 7" descr="텍스트, 도표, 라인, 스크린샷이(가) 표시된 사진&#10;&#10;AI 생성 콘텐츠는 정확하지 않을 수 있습니다.">
+            <a:extLst>
+              <a:ext uri="{FF2B5EF4-FFF2-40B4-BE49-F238E27FC236}">
+                <a16:creationId xmlns:a16="http://schemas.microsoft.com/office/drawing/2014/main" id="{244CF281-9930-02E9-8DC7-3C2D84B45D3D}"/>
+              </a:ext>
+            </a:extLst>
+          </p:cNvPr>
+          <p:cNvPicPr>
+            <a:picLocks noChangeAspect="1"/>
+          </p:cNvPicPr>
+          <p:nvPr/>
+        </p:nvPicPr>
+        <p:blipFill>
+          <a:blip r:embed="rId3"/>
+          <a:stretch>
+            <a:fillRect/>
+          </a:stretch>
+        </p:blipFill>
+        <p:spPr>
+          <a:xfrm>
+            <a:off x="8675768" y="4144161"/>
+            <a:ext cx="3031599" cy="2392746"/>
+          </a:xfrm>
+          <a:prstGeom prst="rect">
+            <a:avLst/>
+          </a:prstGeom>
+        </p:spPr>
+      </p:pic>
       <p:sp>
         <p:nvSpPr>
-          <p:cNvPr id="3" name="TextBox 2">
+          <p:cNvPr id="5" name="TextBox 4">
             <a:extLst>
               <a:ext uri="{FF2B5EF4-FFF2-40B4-BE49-F238E27FC236}">
-                <a16:creationId xmlns:a16="http://schemas.microsoft.com/office/drawing/2014/main" id="{DF8F4FF6-003A-E935-1BE1-9C8334ECE6FA}"/>
+                <a16:creationId xmlns:a16="http://schemas.microsoft.com/office/drawing/2014/main" id="{08E1235D-9AC0-EB46-A137-3F2EB02C0908}"/>
               </a:ext>
             </a:extLst>
           </p:cNvPr>
@@ -10287,8 +10854,8 @@
         </p:nvSpPr>
         <p:spPr>
           <a:xfrm>
-            <a:off x="288790" y="958844"/>
-            <a:ext cx="11693660" cy="5215338"/>
+            <a:off x="9085126" y="3808063"/>
+            <a:ext cx="1944693" cy="307777"/>
           </a:xfrm>
           <a:prstGeom prst="rect">
             <a:avLst/>
@@ -10296,364 +10863,256 @@
           <a:noFill/>
         </p:spPr>
         <p:txBody>
-          <a:bodyPr wrap="square" rtlCol="0" anchor="t">
+          <a:bodyPr wrap="square">
             <a:spAutoFit/>
           </a:bodyPr>
           <a:lstStyle/>
           <a:p>
-            <a:pPr marL="377825" indent="-285750">
-              <a:lnSpc>
-                <a:spcPct val="150000"/>
-              </a:lnSpc>
-              <a:buFont typeface="Arial" panose="020B0604020202020204" pitchFamily="34" charset="0"/>
-              <a:buChar char="•"/>
-            </a:pPr>
-            <a:r>
-              <a:rPr lang="ko-KR" altLang="en-US" sz="1600" spc="-50" dirty="0"/>
-              <a:t>후생경제학의 주요 과제 중 하나는 어떤 변화가 개선인지의 여부를 평가하는 기준을 찾아내는 일이다</a:t>
-            </a:r>
-            <a:r>
-              <a:rPr lang="en-US" altLang="ko-KR" sz="1600" spc="-50" dirty="0"/>
-              <a:t>.</a:t>
-            </a:r>
-          </a:p>
-          <a:p>
-            <a:pPr marL="835025" lvl="1" indent="-285750">
-              <a:lnSpc>
-                <a:spcPct val="150000"/>
-              </a:lnSpc>
-              <a:buFont typeface="Wingdings" panose="05000000000000000000" pitchFamily="2" charset="2"/>
-              <a:buChar char="ü"/>
-            </a:pPr>
-            <a:r>
-              <a:rPr lang="ko-KR" altLang="en-US" sz="1600" spc="-50" dirty="0"/>
-              <a:t>어떤 변화로 인해 이득을 보는 사람</a:t>
-            </a:r>
-            <a:r>
-              <a:rPr lang="en-US" altLang="ko-KR" sz="1600" spc="-50" dirty="0"/>
-              <a:t>, </a:t>
-            </a:r>
-            <a:r>
-              <a:rPr lang="ko-KR" altLang="en-US" sz="1600" spc="-50" dirty="0"/>
-              <a:t>손해를 보는 사람 모두 생긴다면 그 이득과 손실을 어떻게 비교해서 결론을 내릴까</a:t>
-            </a:r>
-            <a:r>
-              <a:rPr lang="en-US" altLang="ko-KR" sz="1600" spc="-50" dirty="0"/>
-              <a:t>?</a:t>
-            </a:r>
-          </a:p>
-          <a:p>
-            <a:pPr marL="377825" indent="-285750">
-              <a:lnSpc>
-                <a:spcPct val="150000"/>
-              </a:lnSpc>
-              <a:buFont typeface="Arial" panose="020B0604020202020204" pitchFamily="34" charset="0"/>
-              <a:buChar char="•"/>
-            </a:pPr>
-            <a:endParaRPr lang="en-US" altLang="ko-KR" sz="1600" spc="-50" dirty="0"/>
-          </a:p>
-          <a:p>
-            <a:pPr marL="377825" indent="-285750">
-              <a:lnSpc>
-                <a:spcPct val="150000"/>
-              </a:lnSpc>
-              <a:buFont typeface="Arial" panose="020B0604020202020204" pitchFamily="34" charset="0"/>
-              <a:buChar char="•"/>
-            </a:pPr>
-            <a:r>
-              <a:rPr lang="ko-KR" altLang="en-US" sz="1600" spc="-50" dirty="0"/>
-              <a:t>우선</a:t>
-            </a:r>
-            <a:r>
-              <a:rPr lang="en-US" altLang="ko-KR" sz="1600" spc="-50" dirty="0"/>
-              <a:t>, </a:t>
-            </a:r>
-            <a:r>
-              <a:rPr lang="ko-KR" altLang="en-US" sz="1600" spc="-50" dirty="0"/>
-              <a:t>이 변화가 개선인지 평가하기 위해서는 서로 다른 사람에게 일어나는 이득과 손실을 비교할 수 있어야 한다</a:t>
-            </a:r>
-            <a:r>
-              <a:rPr lang="en-US" altLang="ko-KR" sz="1600" spc="-50" dirty="0"/>
-              <a:t>.</a:t>
-            </a:r>
-          </a:p>
-          <a:p>
-            <a:pPr marL="835025" lvl="1" indent="-285750">
-              <a:lnSpc>
-                <a:spcPct val="150000"/>
-              </a:lnSpc>
-              <a:buFont typeface="Wingdings" panose="05000000000000000000" pitchFamily="2" charset="2"/>
-              <a:buChar char="ü"/>
-            </a:pPr>
-            <a:r>
-              <a:rPr lang="ko-KR" altLang="en-US" sz="1600" spc="-50" dirty="0"/>
-              <a:t>개인간의 효용비교가 이루어져야 한다는 의미인데</a:t>
-            </a:r>
-            <a:r>
-              <a:rPr lang="en-US" altLang="ko-KR" sz="1600" spc="-50" dirty="0"/>
-              <a:t>, </a:t>
-            </a:r>
-            <a:r>
-              <a:rPr lang="ko-KR" altLang="en-US" sz="1600" spc="-50" dirty="0"/>
-              <a:t>이는 불가능한 일에 가깝다</a:t>
-            </a:r>
-            <a:r>
-              <a:rPr lang="en-US" altLang="ko-KR" sz="1600" spc="-50" dirty="0"/>
-              <a:t>.</a:t>
-            </a:r>
-          </a:p>
-          <a:p>
-            <a:pPr marL="1292225" lvl="2" indent="-285750">
-              <a:lnSpc>
-                <a:spcPct val="150000"/>
-              </a:lnSpc>
-              <a:buFont typeface="Wingdings" panose="05000000000000000000" pitchFamily="2" charset="2"/>
-              <a:buChar char="Ø"/>
-            </a:pPr>
-            <a:r>
-              <a:rPr lang="ko-KR" altLang="en-US" sz="1600" spc="-50" dirty="0"/>
-              <a:t>어떤 변화로 인해 김씨가 </a:t>
-            </a:r>
-            <a:r>
-              <a:rPr lang="en-US" altLang="ko-KR" sz="1600" spc="-50" dirty="0"/>
-              <a:t>5</a:t>
-            </a:r>
-            <a:r>
-              <a:rPr lang="ko-KR" altLang="en-US" sz="1600" spc="-50" dirty="0"/>
-              <a:t>단위의 효용 증가를 </a:t>
-            </a:r>
-            <a:r>
-              <a:rPr lang="ko-KR" altLang="en-US" sz="1600" spc="-50" dirty="0" err="1"/>
-              <a:t>느껴고</a:t>
-            </a:r>
-            <a:r>
-              <a:rPr lang="en-US" altLang="ko-KR" sz="1600" spc="-50" dirty="0"/>
-              <a:t>, </a:t>
-            </a:r>
-            <a:r>
-              <a:rPr lang="ko-KR" altLang="en-US" sz="1600" spc="-50" dirty="0"/>
-              <a:t>박씨는 </a:t>
-            </a:r>
-            <a:r>
-              <a:rPr lang="en-US" altLang="ko-KR" sz="1600" spc="-50" dirty="0"/>
-              <a:t>3</a:t>
-            </a:r>
-            <a:r>
-              <a:rPr lang="ko-KR" altLang="en-US" sz="1600" spc="-50" dirty="0"/>
-              <a:t>단위의 효용 감소를 느꼈다고 하자</a:t>
-            </a:r>
-            <a:r>
-              <a:rPr lang="en-US" altLang="ko-KR" sz="1600" spc="-50" dirty="0"/>
-              <a:t>.</a:t>
-            </a:r>
-          </a:p>
-          <a:p>
-            <a:pPr marL="1292225" lvl="2" indent="-285750">
-              <a:lnSpc>
-                <a:spcPct val="150000"/>
-              </a:lnSpc>
-              <a:buFont typeface="Wingdings" panose="05000000000000000000" pitchFamily="2" charset="2"/>
-              <a:buChar char="Ø"/>
-            </a:pPr>
-            <a:r>
-              <a:rPr lang="ko-KR" altLang="en-US" sz="1600" spc="-50" dirty="0"/>
-              <a:t>사회전체적으로 </a:t>
-            </a:r>
-            <a:r>
-              <a:rPr lang="en-US" altLang="ko-KR" sz="1600" spc="-50" dirty="0"/>
-              <a:t>2</a:t>
-            </a:r>
-            <a:r>
-              <a:rPr lang="ko-KR" altLang="en-US" sz="1600" spc="-50" dirty="0"/>
-              <a:t>단위의 효용이 증가했으니</a:t>
-            </a:r>
-            <a:r>
-              <a:rPr lang="en-US" altLang="ko-KR" sz="1600" spc="-50" dirty="0"/>
-              <a:t>, </a:t>
-            </a:r>
-            <a:r>
-              <a:rPr lang="ko-KR" altLang="en-US" sz="1600" spc="-50" dirty="0"/>
-              <a:t>사회가 개선되었다고 평가할 수는 없다</a:t>
-            </a:r>
-            <a:r>
-              <a:rPr lang="en-US" altLang="ko-KR" sz="1600" spc="-50" dirty="0"/>
-              <a:t>.</a:t>
-            </a:r>
-          </a:p>
-          <a:p>
-            <a:pPr marL="1292225" lvl="2" indent="-285750">
-              <a:lnSpc>
-                <a:spcPct val="150000"/>
-              </a:lnSpc>
-              <a:buFont typeface="Wingdings" panose="05000000000000000000" pitchFamily="2" charset="2"/>
-              <a:buChar char="Ø"/>
-            </a:pPr>
-            <a:r>
-              <a:rPr lang="ko-KR" altLang="en-US" sz="1600" spc="-50" dirty="0"/>
-              <a:t>김씨의 효용 </a:t>
-            </a:r>
-            <a:r>
-              <a:rPr lang="en-US" altLang="ko-KR" sz="1600" spc="-50" dirty="0"/>
-              <a:t>1</a:t>
-            </a:r>
-            <a:r>
-              <a:rPr lang="ko-KR" altLang="en-US" sz="1600" spc="-50" dirty="0"/>
-              <a:t>단위와 박씨의 효용 </a:t>
-            </a:r>
-            <a:r>
-              <a:rPr lang="en-US" altLang="ko-KR" sz="1600" spc="-50" dirty="0"/>
-              <a:t>1</a:t>
-            </a:r>
-            <a:r>
-              <a:rPr lang="ko-KR" altLang="en-US" sz="1600" spc="-50" dirty="0"/>
-              <a:t>단위는 같을 리 없다</a:t>
-            </a:r>
-            <a:r>
-              <a:rPr lang="en-US" altLang="ko-KR" sz="1600" spc="-50" dirty="0"/>
-              <a:t>.</a:t>
-            </a:r>
-          </a:p>
-          <a:p>
-            <a:pPr marL="1292225" lvl="2" indent="-285750">
-              <a:lnSpc>
-                <a:spcPct val="150000"/>
-              </a:lnSpc>
-              <a:buFont typeface="Wingdings" panose="05000000000000000000" pitchFamily="2" charset="2"/>
-              <a:buChar char="Ø"/>
-            </a:pPr>
-            <a:endParaRPr lang="en-US" altLang="ko-KR" sz="1600" spc="-50" dirty="0"/>
-          </a:p>
-          <a:p>
-            <a:pPr marL="377825" indent="-285750">
-              <a:lnSpc>
-                <a:spcPct val="150000"/>
-              </a:lnSpc>
-              <a:buFont typeface="Arial" panose="020B0604020202020204" pitchFamily="34" charset="0"/>
-              <a:buChar char="•"/>
-            </a:pPr>
-            <a:r>
-              <a:rPr lang="ko-KR" altLang="en-US" sz="1600" spc="-50" dirty="0"/>
-              <a:t>그렇다면 우리는 개인간 효용비교를 하지 않으면서도 사회적 변화를 평가할 수 있는 방법을 찾아야 한다</a:t>
-            </a:r>
-            <a:r>
-              <a:rPr lang="en-US" altLang="ko-KR" sz="1600" spc="-50" dirty="0"/>
-              <a:t>.</a:t>
-            </a:r>
-          </a:p>
-          <a:p>
-            <a:pPr marL="835025" lvl="1" indent="-285750">
-              <a:lnSpc>
-                <a:spcPct val="150000"/>
-              </a:lnSpc>
-              <a:buFont typeface="Wingdings" panose="05000000000000000000" pitchFamily="2" charset="2"/>
-              <a:buChar char="ü"/>
-            </a:pPr>
-            <a:r>
-              <a:rPr lang="ko-KR" altLang="en-US" sz="1600" spc="-50" dirty="0"/>
-              <a:t>이 문제의 해결책으로 제시된 이론이 </a:t>
-            </a:r>
-            <a:r>
-              <a:rPr lang="ko-KR" altLang="en-US" sz="1600" b="1" spc="-50" dirty="0"/>
-              <a:t>보상의 원칙</a:t>
-            </a:r>
-            <a:r>
-              <a:rPr lang="ko-KR" altLang="en-US" sz="1600" spc="-50" dirty="0"/>
-              <a:t>이다</a:t>
-            </a:r>
-            <a:r>
-              <a:rPr lang="en-US" altLang="ko-KR" sz="1600" spc="-50" dirty="0"/>
-              <a:t>.</a:t>
-            </a:r>
-          </a:p>
-          <a:p>
-            <a:pPr marL="1292225" lvl="2" indent="-285750">
-              <a:lnSpc>
-                <a:spcPct val="150000"/>
-              </a:lnSpc>
-              <a:buFont typeface="Wingdings" panose="05000000000000000000" pitchFamily="2" charset="2"/>
-              <a:buChar char="Ø"/>
-            </a:pPr>
-            <a:r>
-              <a:rPr lang="ko-KR" altLang="en-US" sz="1600" b="1" spc="-50" dirty="0" err="1"/>
-              <a:t>칼도기준</a:t>
-            </a:r>
-            <a:r>
-              <a:rPr lang="en-US" altLang="ko-KR" sz="1600" spc="-50" dirty="0"/>
-              <a:t>,</a:t>
-            </a:r>
-            <a:r>
-              <a:rPr lang="en-US" altLang="ko-KR" sz="1600" b="1" spc="-50" dirty="0"/>
-              <a:t> </a:t>
-            </a:r>
-            <a:r>
-              <a:rPr lang="ko-KR" altLang="en-US" sz="1600" b="1" spc="-50" dirty="0" err="1"/>
-              <a:t>스키토브스키기준</a:t>
-            </a:r>
-            <a:r>
-              <a:rPr lang="ko-KR" altLang="en-US" sz="1600" spc="-50" dirty="0" err="1"/>
-              <a:t>이</a:t>
-            </a:r>
-            <a:r>
-              <a:rPr lang="ko-KR" altLang="en-US" sz="1600" spc="-50" dirty="0"/>
-              <a:t> 보상의 원칙에 속한다</a:t>
-            </a:r>
-            <a:r>
-              <a:rPr lang="en-US" altLang="ko-KR" sz="1600" spc="-50" dirty="0"/>
-              <a:t>.</a:t>
-            </a:r>
-          </a:p>
-          <a:p>
-            <a:pPr marL="835025" lvl="1" indent="-285750">
-              <a:lnSpc>
-                <a:spcPct val="150000"/>
-              </a:lnSpc>
-              <a:buFont typeface="Wingdings" panose="05000000000000000000" pitchFamily="2" charset="2"/>
-              <a:buChar char="ü"/>
-            </a:pPr>
-            <a:r>
-              <a:rPr lang="ko-KR" altLang="en-US" sz="1600" spc="-50" dirty="0" err="1"/>
-              <a:t>파레토기준은</a:t>
-            </a:r>
-            <a:r>
-              <a:rPr lang="ko-KR" altLang="en-US" sz="1600" spc="-50" dirty="0"/>
-              <a:t> 엄밀하게 말해 보상의 원칙에 속하지 않지만</a:t>
-            </a:r>
-            <a:r>
-              <a:rPr lang="en-US" altLang="ko-KR" sz="1600" spc="-50" dirty="0"/>
-              <a:t>, </a:t>
-            </a:r>
-            <a:r>
-              <a:rPr lang="ko-KR" altLang="en-US" sz="1600" spc="-50" dirty="0"/>
-              <a:t>보상의 원칙을 정확히 이해하기 위해 </a:t>
-            </a:r>
-            <a:r>
-              <a:rPr lang="ko-KR" altLang="en-US" sz="1600" b="1" spc="-50" dirty="0" err="1"/>
-              <a:t>파레토기준</a:t>
-            </a:r>
-            <a:r>
-              <a:rPr lang="ko-KR" altLang="en-US" sz="1600" spc="-50" dirty="0"/>
-              <a:t> 부터 논의를 시작 </a:t>
-            </a:r>
-            <a:r>
-              <a:rPr lang="ko-KR" altLang="en-US" sz="1600" spc="-50" dirty="0" err="1"/>
-              <a:t>하는게</a:t>
-            </a:r>
-            <a:r>
-              <a:rPr lang="ko-KR" altLang="en-US" sz="1600" spc="-50" dirty="0"/>
-              <a:t> 바람직하다</a:t>
-            </a:r>
-            <a:r>
-              <a:rPr lang="en-US" altLang="ko-KR" sz="1600" spc="-50" dirty="0"/>
-              <a:t>.</a:t>
-            </a:r>
-            <a:endParaRPr lang="en-US" altLang="ko-KR" sz="1600" spc="-100" dirty="0"/>
+            <a:pPr algn="ctr"/>
+            <a:r>
+              <a:rPr lang="en-US" altLang="ko-KR" sz="1400" spc="-50" dirty="0"/>
+              <a:t>&lt;</a:t>
+            </a:r>
+            <a:r>
+              <a:rPr lang="ko-KR" altLang="en-US" sz="1400" spc="-50" dirty="0"/>
+              <a:t>파레토 기준</a:t>
+            </a:r>
+            <a:r>
+              <a:rPr lang="en-US" altLang="ko-KR" sz="1400" spc="-50" dirty="0"/>
+              <a:t>&gt;</a:t>
+            </a:r>
+            <a:endParaRPr lang="ko-KR" altLang="en-US" sz="1400" dirty="0"/>
           </a:p>
         </p:txBody>
       </p:sp>
+      <mc:AlternateContent xmlns:mc="http://schemas.openxmlformats.org/markup-compatibility/2006" xmlns:a14="http://schemas.microsoft.com/office/drawing/2010/main">
+        <mc:Choice Requires="a14">
+          <p:sp>
+            <p:nvSpPr>
+              <p:cNvPr id="7" name="TextBox 6">
+                <a:extLst>
+                  <a:ext uri="{FF2B5EF4-FFF2-40B4-BE49-F238E27FC236}">
+                    <a16:creationId xmlns:a16="http://schemas.microsoft.com/office/drawing/2014/main" id="{2A2871D7-8D0D-0A5E-AEC4-C2E2424560CB}"/>
+                  </a:ext>
+                </a:extLst>
+              </p:cNvPr>
+              <p:cNvSpPr txBox="1"/>
+              <p:nvPr/>
+            </p:nvSpPr>
+            <p:spPr>
+              <a:xfrm>
+                <a:off x="288790" y="3937979"/>
+                <a:ext cx="8200869" cy="2630015"/>
+              </a:xfrm>
+              <a:prstGeom prst="rect">
+                <a:avLst/>
+              </a:prstGeom>
+              <a:noFill/>
+            </p:spPr>
+            <p:txBody>
+              <a:bodyPr wrap="square">
+                <a:spAutoFit/>
+              </a:bodyPr>
+              <a:lstStyle/>
+              <a:p>
+                <a:pPr marL="377825" indent="-285750">
+                  <a:lnSpc>
+                    <a:spcPct val="150000"/>
+                  </a:lnSpc>
+                  <a:buFont typeface="Arial" panose="020B0604020202020204" pitchFamily="34" charset="0"/>
+                  <a:buChar char="•"/>
+                </a:pPr>
+                <a:r>
+                  <a:rPr lang="ko-KR" altLang="en-US" sz="1600" dirty="0"/>
+                  <a:t>파레토 기준은 대부분의 사람들이 동의할만한 내용이기는 하지만</a:t>
+                </a:r>
+                <a:r>
+                  <a:rPr lang="en-US" altLang="ko-KR" sz="1600" dirty="0"/>
+                  <a:t>, </a:t>
+                </a:r>
+                <a:r>
+                  <a:rPr lang="ko-KR" altLang="en-US" sz="1600" dirty="0"/>
+                  <a:t>문제점도 있다</a:t>
+                </a:r>
+                <a:r>
+                  <a:rPr lang="en-US" altLang="ko-KR" sz="1600" dirty="0"/>
+                  <a:t>.</a:t>
+                </a:r>
+              </a:p>
+              <a:p>
+                <a:pPr marL="835025" lvl="1" indent="-285750">
+                  <a:lnSpc>
+                    <a:spcPct val="150000"/>
+                  </a:lnSpc>
+                  <a:buFont typeface="Wingdings" panose="05000000000000000000" pitchFamily="2" charset="2"/>
+                  <a:buChar char="ü"/>
+                </a:pPr>
+                <a14:m>
+                  <m:oMath xmlns:m="http://schemas.openxmlformats.org/officeDocument/2006/math">
+                    <m:sSup>
+                      <m:sSupPr>
+                        <m:ctrlPr>
+                          <a:rPr lang="en-US" altLang="ko-KR" sz="1600" i="1">
+                            <a:latin typeface="Cambria Math" panose="02040503050406030204" pitchFamily="18" charset="0"/>
+                          </a:rPr>
+                        </m:ctrlPr>
+                      </m:sSupPr>
+                      <m:e>
+                        <m:r>
+                          <a:rPr lang="en-US" altLang="ko-KR" sz="1600" i="1">
+                            <a:latin typeface="Cambria Math" panose="02040503050406030204" pitchFamily="18" charset="0"/>
+                          </a:rPr>
+                          <m:t>𝑆</m:t>
+                        </m:r>
+                      </m:e>
+                      <m:sup>
+                        <m:r>
+                          <a:rPr lang="en-US" altLang="ko-KR" sz="1600" i="1">
+                            <a:latin typeface="Cambria Math" panose="02040503050406030204" pitchFamily="18" charset="0"/>
+                          </a:rPr>
+                          <m:t>′′</m:t>
+                        </m:r>
+                      </m:sup>
+                    </m:sSup>
+                  </m:oMath>
+                </a14:m>
+                <a:r>
+                  <a:rPr lang="ko-KR" altLang="en-US" sz="1600" dirty="0"/>
+                  <a:t> 점으로의 변화에 대해</a:t>
+                </a:r>
+                <a:r>
+                  <a:rPr lang="en-US" altLang="ko-KR" sz="1600" dirty="0"/>
+                  <a:t>, B</a:t>
+                </a:r>
+                <a:r>
+                  <a:rPr lang="ko-KR" altLang="en-US" sz="1600" dirty="0"/>
+                  <a:t>는 자신의 효용은 그대로인 반면</a:t>
+                </a:r>
+                <a:r>
+                  <a:rPr lang="en-US" altLang="ko-KR" sz="1600" dirty="0"/>
+                  <a:t>, A</a:t>
+                </a:r>
+                <a:r>
+                  <a:rPr lang="ko-KR" altLang="en-US" sz="1600" dirty="0"/>
+                  <a:t>의 효용만 증가하는데 불만을 가질 수 있다</a:t>
+                </a:r>
+                <a:r>
+                  <a:rPr lang="en-US" altLang="ko-KR" sz="1600" dirty="0"/>
+                  <a:t>. </a:t>
+                </a:r>
+              </a:p>
+              <a:p>
+                <a:pPr marL="1292225" lvl="2" indent="-285750">
+                  <a:lnSpc>
+                    <a:spcPct val="150000"/>
+                  </a:lnSpc>
+                  <a:buFont typeface="Wingdings" panose="05000000000000000000" pitchFamily="2" charset="2"/>
+                  <a:buChar char="Ø"/>
+                </a:pPr>
+                <a:r>
+                  <a:rPr lang="ko-KR" altLang="en-US" sz="1600" dirty="0"/>
+                  <a:t>이러한 경우에는 명백한 개선이라 단정하기는 힘들다</a:t>
+                </a:r>
+                <a:r>
+                  <a:rPr lang="en-US" altLang="ko-KR" sz="1600" dirty="0"/>
+                  <a:t>.</a:t>
+                </a:r>
+              </a:p>
+              <a:p>
+                <a:pPr marL="835025" lvl="1" indent="-285750">
+                  <a:lnSpc>
+                    <a:spcPct val="150000"/>
+                  </a:lnSpc>
+                  <a:buFont typeface="Wingdings" panose="05000000000000000000" pitchFamily="2" charset="2"/>
+                  <a:buChar char="ü"/>
+                </a:pPr>
+                <a:r>
+                  <a:rPr lang="ko-KR" altLang="en-US" sz="1600" dirty="0"/>
+                  <a:t>현실세계에서는 대부분의 변화가 어떤 사람에게는 이득을</a:t>
+                </a:r>
+                <a:r>
+                  <a:rPr lang="en-US" altLang="ko-KR" sz="1600" dirty="0"/>
+                  <a:t>, </a:t>
+                </a:r>
+                <a:r>
+                  <a:rPr lang="ko-KR" altLang="en-US" sz="1600" dirty="0"/>
+                  <a:t>다른 사람에게는 손해를 주고 있다</a:t>
+                </a:r>
+                <a:r>
+                  <a:rPr lang="en-US" altLang="ko-KR" sz="1600" dirty="0"/>
+                  <a:t>.</a:t>
+                </a:r>
+              </a:p>
+              <a:p>
+                <a:pPr marL="1292225" lvl="2" indent="-285750">
+                  <a:lnSpc>
+                    <a:spcPct val="150000"/>
+                  </a:lnSpc>
+                  <a:buFont typeface="Wingdings" panose="05000000000000000000" pitchFamily="2" charset="2"/>
+                  <a:buChar char="Ø"/>
+                </a:pPr>
+                <a:r>
+                  <a:rPr lang="ko-KR" altLang="en-US" sz="1600" dirty="0"/>
+                  <a:t>파레토 기준이 현실에서는 유용하지 않다는 비판을 받을 수 있다</a:t>
+                </a:r>
+                <a:r>
+                  <a:rPr lang="en-US" altLang="ko-KR" sz="1600" dirty="0"/>
+                  <a:t>.</a:t>
+                </a:r>
+                <a:endParaRPr lang="en-US" altLang="ko-KR" sz="1600" spc="-50" dirty="0"/>
+              </a:p>
+            </p:txBody>
+          </p:sp>
+        </mc:Choice>
+        <mc:Fallback xmlns="">
+          <p:sp>
+            <p:nvSpPr>
+              <p:cNvPr id="7" name="TextBox 6">
+                <a:extLst>
+                  <a:ext uri="{FF2B5EF4-FFF2-40B4-BE49-F238E27FC236}">
+                    <a16:creationId xmlns:a16="http://schemas.microsoft.com/office/drawing/2014/main" id="{2A2871D7-8D0D-0A5E-AEC4-C2E2424560CB}"/>
+                  </a:ext>
+                </a:extLst>
+              </p:cNvPr>
+              <p:cNvSpPr txBox="1">
+                <a:spLocks noRot="1" noChangeAspect="1" noMove="1" noResize="1" noEditPoints="1" noAdjustHandles="1" noChangeArrowheads="1" noChangeShapeType="1" noTextEdit="1"/>
+              </p:cNvSpPr>
+              <p:nvPr/>
+            </p:nvSpPr>
+            <p:spPr>
+              <a:xfrm>
+                <a:off x="288790" y="3937979"/>
+                <a:ext cx="8200869" cy="2630015"/>
+              </a:xfrm>
+              <a:prstGeom prst="rect">
+                <a:avLst/>
+              </a:prstGeom>
+              <a:blipFill>
+                <a:blip r:embed="rId4"/>
+                <a:stretch>
+                  <a:fillRect b="-2088"/>
+                </a:stretch>
+              </a:blipFill>
+            </p:spPr>
+            <p:txBody>
+              <a:bodyPr/>
+              <a:lstStyle/>
+              <a:p>
+                <a:r>
+                  <a:rPr lang="ko-KR" altLang="en-US">
+                    <a:noFill/>
+                  </a:rPr>
+                  <a:t> </a:t>
+                </a:r>
+              </a:p>
+            </p:txBody>
+          </p:sp>
+        </mc:Fallback>
+      </mc:AlternateContent>
     </p:spTree>
     <p:extLst>
       <p:ext uri="{BB962C8B-B14F-4D97-AF65-F5344CB8AC3E}">
-        <p14:creationId xmlns:p14="http://schemas.microsoft.com/office/powerpoint/2010/main" val="1039717288"/>
+        <p14:creationId xmlns:p14="http://schemas.microsoft.com/office/powerpoint/2010/main" val="1845042727"/>
       </p:ext>
     </p:extLst>
   </p:cSld>
@@ -10820,937 +11279,6 @@
         <p:cNvPr id="1" name="">
           <a:extLst>
             <a:ext uri="{FF2B5EF4-FFF2-40B4-BE49-F238E27FC236}">
-              <a16:creationId xmlns:a16="http://schemas.microsoft.com/office/drawing/2014/main" id="{39EF4861-61EA-4E16-9253-6043784F6264}"/>
-            </a:ext>
-          </a:extLst>
-        </p:cNvPr>
-        <p:cNvGrpSpPr/>
-        <p:nvPr/>
-      </p:nvGrpSpPr>
-      <p:grpSpPr>
-        <a:xfrm>
-          <a:off x="0" y="0"/>
-          <a:ext cx="0" cy="0"/>
-          <a:chOff x="0" y="0"/>
-          <a:chExt cx="0" cy="0"/>
-        </a:xfrm>
-      </p:grpSpPr>
-      <p:sp>
-        <p:nvSpPr>
-          <p:cNvPr id="2" name="제목 1">
-            <a:extLst>
-              <a:ext uri="{FF2B5EF4-FFF2-40B4-BE49-F238E27FC236}">
-                <a16:creationId xmlns:a16="http://schemas.microsoft.com/office/drawing/2014/main" id="{081923F1-DE4A-6E75-07C1-BC57F99BB123}"/>
-              </a:ext>
-            </a:extLst>
-          </p:cNvPr>
-          <p:cNvSpPr>
-            <a:spLocks noGrp="1"/>
-          </p:cNvSpPr>
-          <p:nvPr>
-            <p:ph type="title"/>
-          </p:nvPr>
-        </p:nvSpPr>
-        <p:spPr/>
-        <p:txBody>
-          <a:bodyPr/>
-          <a:lstStyle/>
-          <a:p>
-            <a:r>
-              <a:rPr lang="ko-KR" altLang="en-US" dirty="0" err="1"/>
-              <a:t>파레토기준</a:t>
-            </a:r>
-            <a:endParaRPr lang="ko-KR" altLang="en-US" dirty="0"/>
-          </a:p>
-        </p:txBody>
-      </p:sp>
-      <p:sp>
-        <p:nvSpPr>
-          <p:cNvPr id="4" name="슬라이드 번호 개체 틀 3">
-            <a:extLst>
-              <a:ext uri="{FF2B5EF4-FFF2-40B4-BE49-F238E27FC236}">
-                <a16:creationId xmlns:a16="http://schemas.microsoft.com/office/drawing/2014/main" id="{080DE975-E843-5169-492A-80F9FEEF5A87}"/>
-              </a:ext>
-            </a:extLst>
-          </p:cNvPr>
-          <p:cNvSpPr>
-            <a:spLocks noGrp="1"/>
-          </p:cNvSpPr>
-          <p:nvPr>
-            <p:ph type="sldNum" sz="quarter" idx="12"/>
-          </p:nvPr>
-        </p:nvSpPr>
-        <p:spPr/>
-        <p:txBody>
-          <a:bodyPr/>
-          <a:lstStyle/>
-          <a:p>
-            <a:fld id="{109C872D-39A9-4065-8BF3-6A613116E2A1}" type="slidenum">
-              <a:rPr lang="ko-KR" altLang="en-US" smtClean="0"/>
-              <a:t>20</a:t>
-            </a:fld>
-            <a:endParaRPr lang="ko-KR" altLang="en-US"/>
-          </a:p>
-        </p:txBody>
-      </p:sp>
-      <mc:AlternateContent xmlns:mc="http://schemas.openxmlformats.org/markup-compatibility/2006" xmlns:a14="http://schemas.microsoft.com/office/drawing/2010/main">
-        <mc:Choice Requires="a14">
-          <p:sp>
-            <p:nvSpPr>
-              <p:cNvPr id="3" name="TextBox 2">
-                <a:extLst>
-                  <a:ext uri="{FF2B5EF4-FFF2-40B4-BE49-F238E27FC236}">
-                    <a16:creationId xmlns:a16="http://schemas.microsoft.com/office/drawing/2014/main" id="{2C45CFC6-B38B-31BA-76D4-7958D336FA77}"/>
-                  </a:ext>
-                </a:extLst>
-              </p:cNvPr>
-              <p:cNvSpPr txBox="1"/>
-              <p:nvPr/>
-            </p:nvSpPr>
-            <p:spPr>
-              <a:xfrm>
-                <a:off x="288790" y="958844"/>
-                <a:ext cx="11693660" cy="3040512"/>
-              </a:xfrm>
-              <a:prstGeom prst="rect">
-                <a:avLst/>
-              </a:prstGeom>
-              <a:noFill/>
-            </p:spPr>
-            <p:txBody>
-              <a:bodyPr wrap="square" rtlCol="0" anchor="t">
-                <a:spAutoFit/>
-              </a:bodyPr>
-              <a:lstStyle/>
-              <a:p>
-                <a:pPr marL="377825" indent="-285750">
-                  <a:lnSpc>
-                    <a:spcPct val="150000"/>
-                  </a:lnSpc>
-                  <a:buFont typeface="Arial" panose="020B0604020202020204" pitchFamily="34" charset="0"/>
-                  <a:buChar char="•"/>
-                </a:pPr>
-                <a:r>
-                  <a:rPr lang="ko-KR" altLang="en-US" sz="1600" spc="-50" dirty="0"/>
-                  <a:t>아래 그림에 표현되어 있듯이</a:t>
-                </a:r>
-                <a:r>
-                  <a:rPr lang="en-US" altLang="ko-KR" sz="1600" spc="-50" dirty="0"/>
-                  <a:t>, A</a:t>
-                </a:r>
-                <a:r>
-                  <a:rPr lang="ko-KR" altLang="en-US" sz="1600" spc="-50" dirty="0"/>
-                  <a:t>와 </a:t>
-                </a:r>
-                <a:r>
-                  <a:rPr lang="en-US" altLang="ko-KR" sz="1600" spc="-50" dirty="0"/>
-                  <a:t>B </a:t>
-                </a:r>
-                <a:r>
-                  <a:rPr lang="ko-KR" altLang="en-US" sz="1600" spc="-50" dirty="0"/>
-                  <a:t>두 사람이 사는 사회가</a:t>
-                </a:r>
-                <a:r>
-                  <a:rPr lang="en-US" altLang="ko-KR" sz="1600" spc="-50" dirty="0"/>
-                  <a:t> </a:t>
-                </a:r>
-                <a:r>
-                  <a:rPr lang="ko-KR" altLang="en-US" sz="1600" spc="-50" dirty="0"/>
-                  <a:t>있다</a:t>
-                </a:r>
-                <a:r>
-                  <a:rPr lang="en-US" altLang="ko-KR" sz="1600" spc="-50" dirty="0"/>
-                  <a:t>.</a:t>
-                </a:r>
-              </a:p>
-              <a:p>
-                <a:pPr marL="835025" lvl="1" indent="-285750">
-                  <a:lnSpc>
-                    <a:spcPct val="150000"/>
-                  </a:lnSpc>
-                  <a:buFont typeface="Wingdings" panose="05000000000000000000" pitchFamily="2" charset="2"/>
-                  <a:buChar char="ü"/>
-                </a:pPr>
-                <a:r>
-                  <a:rPr lang="ko-KR" altLang="en-US" sz="1600" spc="-50" dirty="0"/>
-                  <a:t>현재 두 사람의 효용수준은 </a:t>
-                </a:r>
-                <a14:m>
-                  <m:oMath xmlns:m="http://schemas.openxmlformats.org/officeDocument/2006/math">
-                    <m:r>
-                      <a:rPr lang="en-US" altLang="ko-KR" sz="1600" b="0" i="1" spc="-50" smtClean="0">
-                        <a:latin typeface="Cambria Math" panose="02040503050406030204" pitchFamily="18" charset="0"/>
-                      </a:rPr>
-                      <m:t>𝑆</m:t>
-                    </m:r>
-                  </m:oMath>
-                </a14:m>
-                <a:r>
-                  <a:rPr lang="ko-KR" altLang="en-US" sz="1600" spc="-50" dirty="0"/>
-                  <a:t>점에 있다</a:t>
-                </a:r>
-                <a:r>
-                  <a:rPr lang="en-US" altLang="ko-KR" sz="1600" spc="-50" dirty="0"/>
-                  <a:t>.</a:t>
-                </a:r>
-                <a:r>
-                  <a:rPr lang="ko-KR" altLang="en-US" sz="1600" spc="-50" dirty="0"/>
-                  <a:t> 즉 </a:t>
-                </a:r>
-                <a:r>
-                  <a:rPr lang="en-US" altLang="ko-KR" sz="1600" spc="-50" dirty="0"/>
-                  <a:t>A</a:t>
-                </a:r>
-                <a:r>
-                  <a:rPr lang="ko-KR" altLang="en-US" sz="1600" spc="-50" dirty="0"/>
-                  <a:t>는 </a:t>
-                </a:r>
-                <a14:m>
-                  <m:oMath xmlns:m="http://schemas.openxmlformats.org/officeDocument/2006/math">
-                    <m:sSub>
-                      <m:sSubPr>
-                        <m:ctrlPr>
-                          <a:rPr lang="en-US" altLang="ko-KR" sz="1600" i="1">
-                            <a:latin typeface="Cambria Math" panose="02040503050406030204" pitchFamily="18" charset="0"/>
-                          </a:rPr>
-                        </m:ctrlPr>
-                      </m:sSubPr>
-                      <m:e>
-                        <m:bar>
-                          <m:barPr>
-                            <m:pos m:val="top"/>
-                            <m:ctrlPr>
-                              <a:rPr lang="en-US" altLang="ko-KR" sz="1600" i="1">
-                                <a:latin typeface="Cambria Math" panose="02040503050406030204" pitchFamily="18" charset="0"/>
-                              </a:rPr>
-                            </m:ctrlPr>
-                          </m:barPr>
-                          <m:e>
-                            <m:r>
-                              <a:rPr lang="en-US" altLang="ko-KR" sz="1600" i="1">
-                                <a:latin typeface="Cambria Math" panose="02040503050406030204" pitchFamily="18" charset="0"/>
-                              </a:rPr>
-                              <m:t>𝑈</m:t>
-                            </m:r>
-                          </m:e>
-                        </m:bar>
-                      </m:e>
-                      <m:sub>
-                        <m:r>
-                          <a:rPr lang="en-US" altLang="ko-KR" sz="1600" i="1">
-                            <a:latin typeface="Cambria Math" panose="02040503050406030204" pitchFamily="18" charset="0"/>
-                          </a:rPr>
-                          <m:t>𝐴</m:t>
-                        </m:r>
-                      </m:sub>
-                    </m:sSub>
-                  </m:oMath>
-                </a14:m>
-                <a:r>
-                  <a:rPr lang="ko-KR" altLang="en-US" sz="1600" spc="-50" dirty="0"/>
-                  <a:t>의 효용수준을 갖고</a:t>
-                </a:r>
-                <a:r>
-                  <a:rPr lang="en-US" altLang="ko-KR" sz="1600" spc="-50" dirty="0"/>
-                  <a:t>, B</a:t>
-                </a:r>
-                <a:r>
-                  <a:rPr lang="ko-KR" altLang="en-US" sz="1600" spc="-50" dirty="0"/>
-                  <a:t>는 </a:t>
-                </a:r>
-                <a14:m>
-                  <m:oMath xmlns:m="http://schemas.openxmlformats.org/officeDocument/2006/math">
-                    <m:sSub>
-                      <m:sSubPr>
-                        <m:ctrlPr>
-                          <a:rPr lang="en-US" altLang="ko-KR" sz="1600" i="1">
-                            <a:latin typeface="Cambria Math" panose="02040503050406030204" pitchFamily="18" charset="0"/>
-                          </a:rPr>
-                        </m:ctrlPr>
-                      </m:sSubPr>
-                      <m:e>
-                        <m:bar>
-                          <m:barPr>
-                            <m:pos m:val="top"/>
-                            <m:ctrlPr>
-                              <a:rPr lang="en-US" altLang="ko-KR" sz="1600" i="1">
-                                <a:latin typeface="Cambria Math" panose="02040503050406030204" pitchFamily="18" charset="0"/>
-                              </a:rPr>
-                            </m:ctrlPr>
-                          </m:barPr>
-                          <m:e>
-                            <m:r>
-                              <a:rPr lang="en-US" altLang="ko-KR" sz="1600" i="1">
-                                <a:latin typeface="Cambria Math" panose="02040503050406030204" pitchFamily="18" charset="0"/>
-                              </a:rPr>
-                              <m:t>𝑈</m:t>
-                            </m:r>
-                          </m:e>
-                        </m:bar>
-                      </m:e>
-                      <m:sub>
-                        <m:r>
-                          <a:rPr lang="en-US" altLang="ko-KR" sz="1600" b="0" i="1" smtClean="0">
-                            <a:latin typeface="Cambria Math" panose="02040503050406030204" pitchFamily="18" charset="0"/>
-                          </a:rPr>
-                          <m:t>𝐵</m:t>
-                        </m:r>
-                      </m:sub>
-                    </m:sSub>
-                  </m:oMath>
-                </a14:m>
-                <a:r>
-                  <a:rPr lang="ko-KR" altLang="en-US" sz="1600" spc="-50" dirty="0"/>
-                  <a:t>의 효용수준을 갖고 있다</a:t>
-                </a:r>
-                <a:r>
-                  <a:rPr lang="en-US" altLang="ko-KR" sz="1600" spc="-50" dirty="0"/>
-                  <a:t>.</a:t>
-                </a:r>
-              </a:p>
-              <a:p>
-                <a:pPr marL="377825" indent="-285750">
-                  <a:lnSpc>
-                    <a:spcPct val="150000"/>
-                  </a:lnSpc>
-                  <a:buFont typeface="Arial" panose="020B0604020202020204" pitchFamily="34" charset="0"/>
-                  <a:buChar char="•"/>
-                </a:pPr>
-                <a:r>
-                  <a:rPr lang="ko-KR" altLang="en-US" sz="1600" spc="-50" dirty="0"/>
-                  <a:t>어떤 이유에 의해 이 상태</a:t>
-                </a:r>
-                <a:r>
-                  <a:rPr lang="en-US" altLang="ko-KR" sz="1600" spc="-50" dirty="0"/>
-                  <a:t>(</a:t>
-                </a:r>
-                <a14:m>
-                  <m:oMath xmlns:m="http://schemas.openxmlformats.org/officeDocument/2006/math">
-                    <m:r>
-                      <a:rPr lang="en-US" altLang="ko-KR" sz="1600" i="1" spc="-50">
-                        <a:latin typeface="Cambria Math" panose="02040503050406030204" pitchFamily="18" charset="0"/>
-                      </a:rPr>
-                      <m:t>𝑆</m:t>
-                    </m:r>
-                  </m:oMath>
-                </a14:m>
-                <a:r>
-                  <a:rPr lang="ko-KR" altLang="en-US" sz="1600" spc="-50" dirty="0"/>
-                  <a:t>점</a:t>
-                </a:r>
-                <a:r>
-                  <a:rPr lang="en-US" altLang="ko-KR" sz="1600" spc="-50" dirty="0"/>
-                  <a:t>)</a:t>
-                </a:r>
-                <a:r>
-                  <a:rPr lang="ko-KR" altLang="en-US" sz="1600" spc="-50" dirty="0"/>
-                  <a:t>가 다른 것으로 변화하는 경우</a:t>
-                </a:r>
-                <a:r>
-                  <a:rPr lang="en-US" altLang="ko-KR" sz="1600" spc="-50" dirty="0"/>
-                  <a:t>, </a:t>
-                </a:r>
-                <a:r>
-                  <a:rPr lang="ko-KR" altLang="en-US" sz="1600" spc="-50" dirty="0"/>
-                  <a:t>사회적 관점에서 이를 개선이라고 평가할 수 있는지 알아보자</a:t>
-                </a:r>
-                <a:r>
-                  <a:rPr lang="en-US" altLang="ko-KR" sz="1600" spc="-50" dirty="0"/>
-                  <a:t>.</a:t>
-                </a:r>
-              </a:p>
-              <a:p>
-                <a:pPr marL="835025" lvl="1" indent="-285750">
-                  <a:lnSpc>
-                    <a:spcPct val="150000"/>
-                  </a:lnSpc>
-                  <a:buFont typeface="Wingdings" panose="05000000000000000000" pitchFamily="2" charset="2"/>
-                  <a:buChar char="ü"/>
-                </a:pPr>
-                <a:r>
-                  <a:rPr lang="ko-KR" altLang="en-US" sz="1600" b="1" spc="-50" dirty="0"/>
-                  <a:t>파레토 기준</a:t>
-                </a:r>
-                <a:r>
-                  <a:rPr lang="ko-KR" altLang="en-US" sz="1600" spc="-50" dirty="0"/>
-                  <a:t>이라는 평가 기준에서 개선은 새로운 상태에서 어떤 사람의 효용수준도 이전보다 감소하지 않았고</a:t>
-                </a:r>
-                <a:r>
-                  <a:rPr lang="en-US" altLang="ko-KR" sz="1600" spc="-50" dirty="0"/>
-                  <a:t>, </a:t>
-                </a:r>
-                <a:r>
-                  <a:rPr lang="ko-KR" altLang="en-US" sz="1600" spc="-50" dirty="0"/>
-                  <a:t>최소한 한 사람 이상의 효용이 증가한 경우를 의미한다</a:t>
-                </a:r>
-                <a:r>
-                  <a:rPr lang="en-US" altLang="ko-KR" sz="1600" spc="-50" dirty="0"/>
-                  <a:t>.</a:t>
-                </a:r>
-              </a:p>
-              <a:p>
-                <a:pPr marL="835025" lvl="1" indent="-285750">
-                  <a:lnSpc>
-                    <a:spcPct val="150000"/>
-                  </a:lnSpc>
-                  <a:buFont typeface="Wingdings" panose="05000000000000000000" pitchFamily="2" charset="2"/>
-                  <a:buChar char="ü"/>
-                </a:pPr>
-                <a:r>
-                  <a:rPr lang="ko-KR" altLang="en-US" sz="1600" spc="-50" dirty="0"/>
-                  <a:t>그림에서 </a:t>
-                </a:r>
-                <a14:m>
-                  <m:oMath xmlns:m="http://schemas.openxmlformats.org/officeDocument/2006/math">
-                    <m:r>
-                      <a:rPr lang="en-US" altLang="ko-KR" sz="1600" i="1" spc="-50">
-                        <a:latin typeface="Cambria Math" panose="02040503050406030204" pitchFamily="18" charset="0"/>
-                      </a:rPr>
-                      <m:t>𝑆</m:t>
-                    </m:r>
-                  </m:oMath>
-                </a14:m>
-                <a:r>
-                  <a:rPr lang="ko-KR" altLang="en-US" sz="1600" spc="-50" dirty="0"/>
-                  <a:t>점을 중심으로 오른쪽 위에 </a:t>
-                </a:r>
-                <a:r>
-                  <a:rPr lang="ko-KR" altLang="en-US" sz="1600" spc="-50" dirty="0" err="1"/>
-                  <a:t>노란구역으로의</a:t>
-                </a:r>
-                <a:r>
-                  <a:rPr lang="ko-KR" altLang="en-US" sz="1600" spc="-50" dirty="0"/>
-                  <a:t> 변화를 개선이라고 평가할 수 있다</a:t>
-                </a:r>
-                <a:r>
-                  <a:rPr lang="en-US" altLang="ko-KR" sz="1600" spc="-50" dirty="0"/>
-                  <a:t>.</a:t>
-                </a:r>
-              </a:p>
-              <a:p>
-                <a:pPr marL="1292225" lvl="2" indent="-285750">
-                  <a:lnSpc>
-                    <a:spcPct val="150000"/>
-                  </a:lnSpc>
-                  <a:buFont typeface="Wingdings" panose="05000000000000000000" pitchFamily="2" charset="2"/>
-                  <a:buChar char="Ø"/>
-                </a:pPr>
-                <a14:m>
-                  <m:oMath xmlns:m="http://schemas.openxmlformats.org/officeDocument/2006/math">
-                    <m:r>
-                      <a:rPr lang="en-US" altLang="ko-KR" sz="1600" i="1">
-                        <a:latin typeface="Cambria Math" panose="02040503050406030204" pitchFamily="18" charset="0"/>
-                      </a:rPr>
-                      <m:t>𝑆</m:t>
-                    </m:r>
-                    <m:r>
-                      <a:rPr lang="en-US" altLang="ko-KR" sz="1600" i="1">
-                        <a:latin typeface="Cambria Math" panose="02040503050406030204" pitchFamily="18" charset="0"/>
-                      </a:rPr>
-                      <m:t> </m:t>
-                    </m:r>
-                  </m:oMath>
-                </a14:m>
-                <a:r>
-                  <a:rPr lang="ko-KR" altLang="en-US" sz="1600" dirty="0"/>
-                  <a:t>점에서 </a:t>
-                </a:r>
-                <a14:m>
-                  <m:oMath xmlns:m="http://schemas.openxmlformats.org/officeDocument/2006/math">
-                    <m:sSup>
-                      <m:sSupPr>
-                        <m:ctrlPr>
-                          <a:rPr lang="en-US" altLang="ko-KR" sz="1600" i="1">
-                            <a:latin typeface="Cambria Math" panose="02040503050406030204" pitchFamily="18" charset="0"/>
-                          </a:rPr>
-                        </m:ctrlPr>
-                      </m:sSupPr>
-                      <m:e>
-                        <m:r>
-                          <a:rPr lang="en-US" altLang="ko-KR" sz="1600" i="1">
-                            <a:latin typeface="Cambria Math" panose="02040503050406030204" pitchFamily="18" charset="0"/>
-                          </a:rPr>
-                          <m:t>𝑆</m:t>
-                        </m:r>
-                      </m:e>
-                      <m:sup>
-                        <m:r>
-                          <a:rPr lang="en-US" altLang="ko-KR" sz="1600" i="1">
-                            <a:latin typeface="Cambria Math" panose="02040503050406030204" pitchFamily="18" charset="0"/>
-                          </a:rPr>
-                          <m:t>′</m:t>
-                        </m:r>
-                      </m:sup>
-                    </m:sSup>
-                  </m:oMath>
-                </a14:m>
-                <a:r>
-                  <a:rPr lang="en-US" altLang="ko-KR" sz="1600" dirty="0"/>
-                  <a:t>, </a:t>
-                </a:r>
-                <a14:m>
-                  <m:oMath xmlns:m="http://schemas.openxmlformats.org/officeDocument/2006/math">
-                    <m:sSup>
-                      <m:sSupPr>
-                        <m:ctrlPr>
-                          <a:rPr lang="en-US" altLang="ko-KR" sz="1600" i="1">
-                            <a:latin typeface="Cambria Math" panose="02040503050406030204" pitchFamily="18" charset="0"/>
-                          </a:rPr>
-                        </m:ctrlPr>
-                      </m:sSupPr>
-                      <m:e>
-                        <m:r>
-                          <a:rPr lang="en-US" altLang="ko-KR" sz="1600" i="1">
-                            <a:latin typeface="Cambria Math" panose="02040503050406030204" pitchFamily="18" charset="0"/>
-                          </a:rPr>
-                          <m:t>𝑆</m:t>
-                        </m:r>
-                      </m:e>
-                      <m:sup>
-                        <m:r>
-                          <a:rPr lang="en-US" altLang="ko-KR" sz="1600" i="1">
-                            <a:latin typeface="Cambria Math" panose="02040503050406030204" pitchFamily="18" charset="0"/>
-                          </a:rPr>
-                          <m:t>′</m:t>
-                        </m:r>
-                        <m:r>
-                          <a:rPr lang="en-US" altLang="ko-KR" sz="1600" b="0" i="1" smtClean="0">
-                            <a:latin typeface="Cambria Math" panose="02040503050406030204" pitchFamily="18" charset="0"/>
-                          </a:rPr>
-                          <m:t>′</m:t>
-                        </m:r>
-                      </m:sup>
-                    </m:sSup>
-                  </m:oMath>
-                </a14:m>
-                <a:r>
-                  <a:rPr lang="ko-KR" altLang="en-US" sz="1600" dirty="0"/>
-                  <a:t> 점으로의 변화는 개선으로 평가할 수 있고</a:t>
-                </a:r>
-                <a:r>
-                  <a:rPr lang="en-US" altLang="ko-KR" sz="1600" dirty="0"/>
-                  <a:t>, </a:t>
-                </a:r>
-                <a:r>
-                  <a:rPr lang="ko-KR" altLang="en-US" sz="1600" dirty="0" err="1"/>
-                  <a:t>노란구역</a:t>
-                </a:r>
-                <a:r>
-                  <a:rPr lang="ko-KR" altLang="en-US" sz="1600" dirty="0"/>
-                  <a:t> 바깥쪽에 있는 </a:t>
-                </a:r>
-                <a14:m>
-                  <m:oMath xmlns:m="http://schemas.openxmlformats.org/officeDocument/2006/math">
-                    <m:sSup>
-                      <m:sSupPr>
-                        <m:ctrlPr>
-                          <a:rPr lang="en-US" altLang="ko-KR" sz="1600" i="1">
-                            <a:latin typeface="Cambria Math" panose="02040503050406030204" pitchFamily="18" charset="0"/>
-                          </a:rPr>
-                        </m:ctrlPr>
-                      </m:sSupPr>
-                      <m:e>
-                        <m:r>
-                          <a:rPr lang="en-US" altLang="ko-KR" sz="1600" i="1">
-                            <a:latin typeface="Cambria Math" panose="02040503050406030204" pitchFamily="18" charset="0"/>
-                          </a:rPr>
-                          <m:t>𝑆</m:t>
-                        </m:r>
-                      </m:e>
-                      <m:sup>
-                        <m:r>
-                          <a:rPr lang="en-US" altLang="ko-KR" sz="1600" i="1">
-                            <a:latin typeface="Cambria Math" panose="02040503050406030204" pitchFamily="18" charset="0"/>
-                          </a:rPr>
-                          <m:t>′</m:t>
-                        </m:r>
-                        <m:r>
-                          <a:rPr lang="en-US" altLang="ko-KR" sz="1600" b="0" i="1" smtClean="0">
-                            <a:latin typeface="Cambria Math" panose="02040503050406030204" pitchFamily="18" charset="0"/>
-                          </a:rPr>
-                          <m:t>′′</m:t>
-                        </m:r>
-                      </m:sup>
-                    </m:sSup>
-                  </m:oMath>
-                </a14:m>
-                <a:r>
-                  <a:rPr lang="ko-KR" altLang="en-US" sz="1600" dirty="0"/>
-                  <a:t>으로의 변화는 개선인지 아닌지 알 수 없다고 평가할 수 있다</a:t>
-                </a:r>
-                <a:r>
-                  <a:rPr lang="en-US" altLang="ko-KR" sz="1600" dirty="0"/>
-                  <a:t>.</a:t>
-                </a:r>
-              </a:p>
-            </p:txBody>
-          </p:sp>
-        </mc:Choice>
-        <mc:Fallback xmlns="">
-          <p:sp>
-            <p:nvSpPr>
-              <p:cNvPr id="3" name="TextBox 2">
-                <a:extLst>
-                  <a:ext uri="{FF2B5EF4-FFF2-40B4-BE49-F238E27FC236}">
-                    <a16:creationId xmlns:a16="http://schemas.microsoft.com/office/drawing/2014/main" id="{2C45CFC6-B38B-31BA-76D4-7958D336FA77}"/>
-                  </a:ext>
-                </a:extLst>
-              </p:cNvPr>
-              <p:cNvSpPr txBox="1">
-                <a:spLocks noRot="1" noChangeAspect="1" noMove="1" noResize="1" noEditPoints="1" noAdjustHandles="1" noChangeArrowheads="1" noChangeShapeType="1" noTextEdit="1"/>
-              </p:cNvSpPr>
-              <p:nvPr/>
-            </p:nvSpPr>
-            <p:spPr>
-              <a:xfrm>
-                <a:off x="288790" y="958844"/>
-                <a:ext cx="11693660" cy="3040512"/>
-              </a:xfrm>
-              <a:prstGeom prst="rect">
-                <a:avLst/>
-              </a:prstGeom>
-              <a:blipFill>
-                <a:blip r:embed="rId2"/>
-                <a:stretch>
-                  <a:fillRect b="-1603"/>
-                </a:stretch>
-              </a:blipFill>
-            </p:spPr>
-            <p:txBody>
-              <a:bodyPr/>
-              <a:lstStyle/>
-              <a:p>
-                <a:r>
-                  <a:rPr lang="ko-KR" altLang="en-US">
-                    <a:noFill/>
-                  </a:rPr>
-                  <a:t> </a:t>
-                </a:r>
-              </a:p>
-            </p:txBody>
-          </p:sp>
-        </mc:Fallback>
-      </mc:AlternateContent>
-      <p:pic>
-        <p:nvPicPr>
-          <p:cNvPr id="8" name="그림 7" descr="텍스트, 도표, 라인, 스크린샷이(가) 표시된 사진&#10;&#10;AI 생성 콘텐츠는 정확하지 않을 수 있습니다.">
-            <a:extLst>
-              <a:ext uri="{FF2B5EF4-FFF2-40B4-BE49-F238E27FC236}">
-                <a16:creationId xmlns:a16="http://schemas.microsoft.com/office/drawing/2014/main" id="{244CF281-9930-02E9-8DC7-3C2D84B45D3D}"/>
-              </a:ext>
-            </a:extLst>
-          </p:cNvPr>
-          <p:cNvPicPr>
-            <a:picLocks noChangeAspect="1"/>
-          </p:cNvPicPr>
-          <p:nvPr/>
-        </p:nvPicPr>
-        <p:blipFill>
-          <a:blip r:embed="rId3"/>
-          <a:stretch>
-            <a:fillRect/>
-          </a:stretch>
-        </p:blipFill>
-        <p:spPr>
-          <a:xfrm>
-            <a:off x="8675768" y="4144161"/>
-            <a:ext cx="3031599" cy="2392746"/>
-          </a:xfrm>
-          <a:prstGeom prst="rect">
-            <a:avLst/>
-          </a:prstGeom>
-        </p:spPr>
-      </p:pic>
-      <p:sp>
-        <p:nvSpPr>
-          <p:cNvPr id="5" name="TextBox 4">
-            <a:extLst>
-              <a:ext uri="{FF2B5EF4-FFF2-40B4-BE49-F238E27FC236}">
-                <a16:creationId xmlns:a16="http://schemas.microsoft.com/office/drawing/2014/main" id="{08E1235D-9AC0-EB46-A137-3F2EB02C0908}"/>
-              </a:ext>
-            </a:extLst>
-          </p:cNvPr>
-          <p:cNvSpPr txBox="1"/>
-          <p:nvPr/>
-        </p:nvSpPr>
-        <p:spPr>
-          <a:xfrm>
-            <a:off x="9085126" y="3808063"/>
-            <a:ext cx="1944693" cy="307777"/>
-          </a:xfrm>
-          <a:prstGeom prst="rect">
-            <a:avLst/>
-          </a:prstGeom>
-          <a:noFill/>
-        </p:spPr>
-        <p:txBody>
-          <a:bodyPr wrap="square">
-            <a:spAutoFit/>
-          </a:bodyPr>
-          <a:lstStyle/>
-          <a:p>
-            <a:pPr algn="ctr"/>
-            <a:r>
-              <a:rPr lang="en-US" altLang="ko-KR" sz="1400" spc="-50" dirty="0"/>
-              <a:t>&lt;</a:t>
-            </a:r>
-            <a:r>
-              <a:rPr lang="ko-KR" altLang="en-US" sz="1400" spc="-50" dirty="0"/>
-              <a:t>파레토 기준</a:t>
-            </a:r>
-            <a:r>
-              <a:rPr lang="en-US" altLang="ko-KR" sz="1400" spc="-50" dirty="0"/>
-              <a:t>&gt;</a:t>
-            </a:r>
-            <a:endParaRPr lang="ko-KR" altLang="en-US" sz="1400" dirty="0"/>
-          </a:p>
-        </p:txBody>
-      </p:sp>
-      <mc:AlternateContent xmlns:mc="http://schemas.openxmlformats.org/markup-compatibility/2006" xmlns:a14="http://schemas.microsoft.com/office/drawing/2010/main">
-        <mc:Choice Requires="a14">
-          <p:sp>
-            <p:nvSpPr>
-              <p:cNvPr id="7" name="TextBox 6">
-                <a:extLst>
-                  <a:ext uri="{FF2B5EF4-FFF2-40B4-BE49-F238E27FC236}">
-                    <a16:creationId xmlns:a16="http://schemas.microsoft.com/office/drawing/2014/main" id="{2A2871D7-8D0D-0A5E-AEC4-C2E2424560CB}"/>
-                  </a:ext>
-                </a:extLst>
-              </p:cNvPr>
-              <p:cNvSpPr txBox="1"/>
-              <p:nvPr/>
-            </p:nvSpPr>
-            <p:spPr>
-              <a:xfrm>
-                <a:off x="288790" y="3937979"/>
-                <a:ext cx="8200869" cy="2630015"/>
-              </a:xfrm>
-              <a:prstGeom prst="rect">
-                <a:avLst/>
-              </a:prstGeom>
-              <a:noFill/>
-            </p:spPr>
-            <p:txBody>
-              <a:bodyPr wrap="square">
-                <a:spAutoFit/>
-              </a:bodyPr>
-              <a:lstStyle/>
-              <a:p>
-                <a:pPr marL="377825" indent="-285750">
-                  <a:lnSpc>
-                    <a:spcPct val="150000"/>
-                  </a:lnSpc>
-                  <a:buFont typeface="Arial" panose="020B0604020202020204" pitchFamily="34" charset="0"/>
-                  <a:buChar char="•"/>
-                </a:pPr>
-                <a:r>
-                  <a:rPr lang="ko-KR" altLang="en-US" sz="1600" dirty="0"/>
-                  <a:t>파레토 기준은 대부분의 사람들이 동의할만한 내용이기는 하지만</a:t>
-                </a:r>
-                <a:r>
-                  <a:rPr lang="en-US" altLang="ko-KR" sz="1600" dirty="0"/>
-                  <a:t>, </a:t>
-                </a:r>
-                <a:r>
-                  <a:rPr lang="ko-KR" altLang="en-US" sz="1600" dirty="0"/>
-                  <a:t>문제점도 있다</a:t>
-                </a:r>
-                <a:r>
-                  <a:rPr lang="en-US" altLang="ko-KR" sz="1600" dirty="0"/>
-                  <a:t>.</a:t>
-                </a:r>
-              </a:p>
-              <a:p>
-                <a:pPr marL="835025" lvl="1" indent="-285750">
-                  <a:lnSpc>
-                    <a:spcPct val="150000"/>
-                  </a:lnSpc>
-                  <a:buFont typeface="Wingdings" panose="05000000000000000000" pitchFamily="2" charset="2"/>
-                  <a:buChar char="ü"/>
-                </a:pPr>
-                <a14:m>
-                  <m:oMath xmlns:m="http://schemas.openxmlformats.org/officeDocument/2006/math">
-                    <m:sSup>
-                      <m:sSupPr>
-                        <m:ctrlPr>
-                          <a:rPr lang="en-US" altLang="ko-KR" sz="1600" i="1">
-                            <a:latin typeface="Cambria Math" panose="02040503050406030204" pitchFamily="18" charset="0"/>
-                          </a:rPr>
-                        </m:ctrlPr>
-                      </m:sSupPr>
-                      <m:e>
-                        <m:r>
-                          <a:rPr lang="en-US" altLang="ko-KR" sz="1600" i="1">
-                            <a:latin typeface="Cambria Math" panose="02040503050406030204" pitchFamily="18" charset="0"/>
-                          </a:rPr>
-                          <m:t>𝑆</m:t>
-                        </m:r>
-                      </m:e>
-                      <m:sup>
-                        <m:r>
-                          <a:rPr lang="en-US" altLang="ko-KR" sz="1600" i="1">
-                            <a:latin typeface="Cambria Math" panose="02040503050406030204" pitchFamily="18" charset="0"/>
-                          </a:rPr>
-                          <m:t>′′</m:t>
-                        </m:r>
-                      </m:sup>
-                    </m:sSup>
-                  </m:oMath>
-                </a14:m>
-                <a:r>
-                  <a:rPr lang="ko-KR" altLang="en-US" sz="1600" dirty="0"/>
-                  <a:t> 점으로의 변화에 대해</a:t>
-                </a:r>
-                <a:r>
-                  <a:rPr lang="en-US" altLang="ko-KR" sz="1600" dirty="0"/>
-                  <a:t>, B</a:t>
-                </a:r>
-                <a:r>
-                  <a:rPr lang="ko-KR" altLang="en-US" sz="1600" dirty="0"/>
-                  <a:t>는 자신의 효용은 그대로인 반면</a:t>
-                </a:r>
-                <a:r>
-                  <a:rPr lang="en-US" altLang="ko-KR" sz="1600" dirty="0"/>
-                  <a:t>, A</a:t>
-                </a:r>
-                <a:r>
-                  <a:rPr lang="ko-KR" altLang="en-US" sz="1600" dirty="0"/>
-                  <a:t>의 효용만 증가하는데 불만을 가질 수 있다</a:t>
-                </a:r>
-                <a:r>
-                  <a:rPr lang="en-US" altLang="ko-KR" sz="1600" dirty="0"/>
-                  <a:t>. </a:t>
-                </a:r>
-              </a:p>
-              <a:p>
-                <a:pPr marL="1292225" lvl="2" indent="-285750">
-                  <a:lnSpc>
-                    <a:spcPct val="150000"/>
-                  </a:lnSpc>
-                  <a:buFont typeface="Wingdings" panose="05000000000000000000" pitchFamily="2" charset="2"/>
-                  <a:buChar char="Ø"/>
-                </a:pPr>
-                <a:r>
-                  <a:rPr lang="ko-KR" altLang="en-US" sz="1600" dirty="0"/>
-                  <a:t>이러한 경우에는 명백한 개선이라 단정하기는 힘들다</a:t>
-                </a:r>
-                <a:r>
-                  <a:rPr lang="en-US" altLang="ko-KR" sz="1600" dirty="0"/>
-                  <a:t>.</a:t>
-                </a:r>
-              </a:p>
-              <a:p>
-                <a:pPr marL="835025" lvl="1" indent="-285750">
-                  <a:lnSpc>
-                    <a:spcPct val="150000"/>
-                  </a:lnSpc>
-                  <a:buFont typeface="Wingdings" panose="05000000000000000000" pitchFamily="2" charset="2"/>
-                  <a:buChar char="ü"/>
-                </a:pPr>
-                <a:r>
-                  <a:rPr lang="ko-KR" altLang="en-US" sz="1600" dirty="0"/>
-                  <a:t>현실세계에서는 대부분의 변화가 어떤 사람에게는 이득을</a:t>
-                </a:r>
-                <a:r>
-                  <a:rPr lang="en-US" altLang="ko-KR" sz="1600" dirty="0"/>
-                  <a:t>, </a:t>
-                </a:r>
-                <a:r>
-                  <a:rPr lang="ko-KR" altLang="en-US" sz="1600" dirty="0"/>
-                  <a:t>다른 사람에게는 손해를 주고 있다</a:t>
-                </a:r>
-                <a:r>
-                  <a:rPr lang="en-US" altLang="ko-KR" sz="1600" dirty="0"/>
-                  <a:t>.</a:t>
-                </a:r>
-              </a:p>
-              <a:p>
-                <a:pPr marL="1292225" lvl="2" indent="-285750">
-                  <a:lnSpc>
-                    <a:spcPct val="150000"/>
-                  </a:lnSpc>
-                  <a:buFont typeface="Wingdings" panose="05000000000000000000" pitchFamily="2" charset="2"/>
-                  <a:buChar char="Ø"/>
-                </a:pPr>
-                <a:r>
-                  <a:rPr lang="ko-KR" altLang="en-US" sz="1600" dirty="0"/>
-                  <a:t>파레토 기준이 현실에서는 유용하지 않다는 비판을 받을 수 있다</a:t>
-                </a:r>
-                <a:r>
-                  <a:rPr lang="en-US" altLang="ko-KR" sz="1600" dirty="0"/>
-                  <a:t>.</a:t>
-                </a:r>
-                <a:endParaRPr lang="en-US" altLang="ko-KR" sz="1600" spc="-50" dirty="0"/>
-              </a:p>
-            </p:txBody>
-          </p:sp>
-        </mc:Choice>
-        <mc:Fallback xmlns="">
-          <p:sp>
-            <p:nvSpPr>
-              <p:cNvPr id="7" name="TextBox 6">
-                <a:extLst>
-                  <a:ext uri="{FF2B5EF4-FFF2-40B4-BE49-F238E27FC236}">
-                    <a16:creationId xmlns:a16="http://schemas.microsoft.com/office/drawing/2014/main" id="{2A2871D7-8D0D-0A5E-AEC4-C2E2424560CB}"/>
-                  </a:ext>
-                </a:extLst>
-              </p:cNvPr>
-              <p:cNvSpPr txBox="1">
-                <a:spLocks noRot="1" noChangeAspect="1" noMove="1" noResize="1" noEditPoints="1" noAdjustHandles="1" noChangeArrowheads="1" noChangeShapeType="1" noTextEdit="1"/>
-              </p:cNvSpPr>
-              <p:nvPr/>
-            </p:nvSpPr>
-            <p:spPr>
-              <a:xfrm>
-                <a:off x="288790" y="3937979"/>
-                <a:ext cx="8200869" cy="2630015"/>
-              </a:xfrm>
-              <a:prstGeom prst="rect">
-                <a:avLst/>
-              </a:prstGeom>
-              <a:blipFill>
-                <a:blip r:embed="rId4"/>
-                <a:stretch>
-                  <a:fillRect b="-2088"/>
-                </a:stretch>
-              </a:blipFill>
-            </p:spPr>
-            <p:txBody>
-              <a:bodyPr/>
-              <a:lstStyle/>
-              <a:p>
-                <a:r>
-                  <a:rPr lang="ko-KR" altLang="en-US">
-                    <a:noFill/>
-                  </a:rPr>
-                  <a:t> </a:t>
-                </a:r>
-              </a:p>
-            </p:txBody>
-          </p:sp>
-        </mc:Fallback>
-      </mc:AlternateContent>
-    </p:spTree>
-    <p:extLst>
-      <p:ext uri="{BB962C8B-B14F-4D97-AF65-F5344CB8AC3E}">
-        <p14:creationId xmlns:p14="http://schemas.microsoft.com/office/powerpoint/2010/main" val="1845042727"/>
-      </p:ext>
-    </p:extLst>
-  </p:cSld>
-  <p:clrMapOvr>
-    <a:masterClrMapping/>
-  </p:clrMapOvr>
-</p:sld>
-</file>
-
-<file path=ppt/slides/slide21.xml><?xml version="1.0" encoding="utf-8"?>
-<p:sld xmlns:a="http://schemas.openxmlformats.org/drawingml/2006/main" xmlns:r="http://schemas.openxmlformats.org/officeDocument/2006/relationships" xmlns:p="http://schemas.openxmlformats.org/presentationml/2006/main">
-  <p:cSld>
-    <p:spTree>
-      <p:nvGrpSpPr>
-        <p:cNvPr id="1" name="">
-          <a:extLst>
-            <a:ext uri="{FF2B5EF4-FFF2-40B4-BE49-F238E27FC236}">
               <a16:creationId xmlns:a16="http://schemas.microsoft.com/office/drawing/2014/main" id="{27703958-42D2-D504-E24E-0ED0998369A6}"/>
             </a:ext>
           </a:extLst>
@@ -11818,7 +11346,7 @@
           <a:p>
             <a:fld id="{109C872D-39A9-4065-8BF3-6A613116E2A1}" type="slidenum">
               <a:rPr lang="ko-KR" altLang="en-US" smtClean="0"/>
-              <a:t>21</a:t>
+              <a:t>20</a:t>
             </a:fld>
             <a:endParaRPr lang="ko-KR" altLang="en-US"/>
           </a:p>
@@ -12307,7 +11835,7 @@
 </p:sld>
 </file>
 
-<file path=ppt/slides/slide22.xml><?xml version="1.0" encoding="utf-8"?>
+<file path=ppt/slides/slide21.xml><?xml version="1.0" encoding="utf-8"?>
 <p:sld xmlns:a="http://schemas.openxmlformats.org/drawingml/2006/main" xmlns:r="http://schemas.openxmlformats.org/officeDocument/2006/relationships" xmlns:p="http://schemas.openxmlformats.org/presentationml/2006/main">
   <p:cSld>
     <p:spTree>
@@ -12382,7 +11910,7 @@
           <a:p>
             <a:fld id="{109C872D-39A9-4065-8BF3-6A613116E2A1}" type="slidenum">
               <a:rPr lang="ko-KR" altLang="en-US" smtClean="0"/>
-              <a:t>22</a:t>
+              <a:t>21</a:t>
             </a:fld>
             <a:endParaRPr lang="ko-KR" altLang="en-US"/>
           </a:p>
@@ -13548,7 +13076,7 @@
 </p:sld>
 </file>
 
-<file path=ppt/slides/slide23.xml><?xml version="1.0" encoding="utf-8"?>
+<file path=ppt/slides/slide22.xml><?xml version="1.0" encoding="utf-8"?>
 <p:sld xmlns:a="http://schemas.openxmlformats.org/drawingml/2006/main" xmlns:r="http://schemas.openxmlformats.org/officeDocument/2006/relationships" xmlns:p="http://schemas.openxmlformats.org/presentationml/2006/main">
   <p:cSld>
     <p:spTree>
@@ -13623,7 +13151,7 @@
           <a:p>
             <a:fld id="{109C872D-39A9-4065-8BF3-6A613116E2A1}" type="slidenum">
               <a:rPr lang="ko-KR" altLang="en-US" smtClean="0"/>
-              <a:t>23</a:t>
+              <a:t>22</a:t>
             </a:fld>
             <a:endParaRPr lang="ko-KR" altLang="en-US"/>
           </a:p>
@@ -14342,7 +13870,7 @@
 </p:sld>
 </file>
 
-<file path=ppt/slides/slide24.xml><?xml version="1.0" encoding="utf-8"?>
+<file path=ppt/slides/slide23.xml><?xml version="1.0" encoding="utf-8"?>
 <p:sld xmlns:a="http://schemas.openxmlformats.org/drawingml/2006/main" xmlns:r="http://schemas.openxmlformats.org/officeDocument/2006/relationships" xmlns:p="http://schemas.openxmlformats.org/presentationml/2006/main">
   <p:cSld>
     <p:spTree>
@@ -14420,7 +13948,7 @@
           <a:p>
             <a:fld id="{109C872D-39A9-4065-8BF3-6A613116E2A1}" type="slidenum">
               <a:rPr lang="ko-KR" altLang="en-US" smtClean="0"/>
-              <a:t>24</a:t>
+              <a:t>23</a:t>
             </a:fld>
             <a:endParaRPr lang="ko-KR" altLang="en-US"/>
           </a:p>
@@ -15183,7 +14711,7 @@
 </p:sld>
 </file>
 
-<file path=ppt/slides/slide25.xml><?xml version="1.0" encoding="utf-8"?>
+<file path=ppt/slides/slide24.xml><?xml version="1.0" encoding="utf-8"?>
 <p:sld xmlns:a="http://schemas.openxmlformats.org/drawingml/2006/main" xmlns:r="http://schemas.openxmlformats.org/officeDocument/2006/relationships" xmlns:p="http://schemas.openxmlformats.org/presentationml/2006/main">
   <p:cSld>
     <p:spTree>
@@ -15257,7 +14785,7 @@
           <a:p>
             <a:fld id="{109C872D-39A9-4065-8BF3-6A613116E2A1}" type="slidenum">
               <a:rPr lang="ko-KR" altLang="en-US" smtClean="0"/>
-              <a:t>25</a:t>
+              <a:t>24</a:t>
             </a:fld>
             <a:endParaRPr lang="ko-KR" altLang="en-US"/>
           </a:p>
@@ -15608,7 +15136,7 @@
 </p:sld>
 </file>
 
-<file path=ppt/slides/slide26.xml><?xml version="1.0" encoding="utf-8"?>
+<file path=ppt/slides/slide25.xml><?xml version="1.0" encoding="utf-8"?>
 <p:sld xmlns:a="http://schemas.openxmlformats.org/drawingml/2006/main" xmlns:r="http://schemas.openxmlformats.org/officeDocument/2006/relationships" xmlns:p="http://schemas.openxmlformats.org/presentationml/2006/main">
   <p:cSld>
     <p:spTree>
@@ -15691,7 +15219,7 @@
           <a:p>
             <a:fld id="{109C872D-39A9-4065-8BF3-6A613116E2A1}" type="slidenum">
               <a:rPr lang="ko-KR" altLang="en-US" smtClean="0"/>
-              <a:t>26</a:t>
+              <a:t>25</a:t>
             </a:fld>
             <a:endParaRPr lang="ko-KR" altLang="en-US"/>
           </a:p>
@@ -15751,7 +15279,7 @@
 </p:sld>
 </file>
 
-<file path=ppt/slides/slide27.xml><?xml version="1.0" encoding="utf-8"?>
+<file path=ppt/slides/slide26.xml><?xml version="1.0" encoding="utf-8"?>
 <p:sld xmlns:a="http://schemas.openxmlformats.org/drawingml/2006/main" xmlns:r="http://schemas.openxmlformats.org/officeDocument/2006/relationships" xmlns:p="http://schemas.openxmlformats.org/presentationml/2006/main">
   <p:cSld>
     <p:spTree>
@@ -15825,14 +15353,14 @@
           <a:p>
             <a:fld id="{109C872D-39A9-4065-8BF3-6A613116E2A1}" type="slidenum">
               <a:rPr lang="ko-KR" altLang="en-US" smtClean="0"/>
-              <a:t>27</a:t>
+              <a:t>26</a:t>
             </a:fld>
             <a:endParaRPr lang="ko-KR" altLang="en-US"/>
           </a:p>
         </p:txBody>
       </p:sp>
-      <mc:AlternateContent xmlns:mc="http://schemas.openxmlformats.org/markup-compatibility/2006">
-        <mc:Choice xmlns:a14="http://schemas.microsoft.com/office/drawing/2010/main" Requires="a14">
+      <mc:AlternateContent xmlns:mc="http://schemas.openxmlformats.org/markup-compatibility/2006" xmlns:a14="http://schemas.microsoft.com/office/drawing/2010/main">
+        <mc:Choice Requires="a14">
           <p:sp>
             <p:nvSpPr>
               <p:cNvPr id="3" name="TextBox 2">
@@ -16151,7 +15679,7 @@
             </p:txBody>
           </p:sp>
         </mc:Choice>
-        <mc:Fallback>
+        <mc:Fallback xmlns="">
           <p:sp>
             <p:nvSpPr>
               <p:cNvPr id="3" name="TextBox 2">
@@ -16196,8 +15724,8 @@
           </p:sp>
         </mc:Fallback>
       </mc:AlternateContent>
-      <mc:AlternateContent xmlns:mc="http://schemas.openxmlformats.org/markup-compatibility/2006">
-        <mc:Choice xmlns:a14="http://schemas.microsoft.com/office/drawing/2010/main" Requires="a14">
+      <mc:AlternateContent xmlns:mc="http://schemas.openxmlformats.org/markup-compatibility/2006" xmlns:a14="http://schemas.microsoft.com/office/drawing/2010/main">
+        <mc:Choice Requires="a14">
           <p:sp>
             <p:nvSpPr>
               <p:cNvPr id="6" name="TextBox 5">
@@ -16331,7 +15859,7 @@
             </p:txBody>
           </p:sp>
         </mc:Choice>
-        <mc:Fallback>
+        <mc:Fallback xmlns="">
           <p:sp>
             <p:nvSpPr>
               <p:cNvPr id="6" name="TextBox 5">
@@ -16389,7 +15917,7 @@
 </p:sld>
 </file>
 
-<file path=ppt/slides/slide28.xml><?xml version="1.0" encoding="utf-8"?>
+<file path=ppt/slides/slide27.xml><?xml version="1.0" encoding="utf-8"?>
 <p:sld xmlns:a="http://schemas.openxmlformats.org/drawingml/2006/main" xmlns:r="http://schemas.openxmlformats.org/officeDocument/2006/relationships" xmlns:p="http://schemas.openxmlformats.org/presentationml/2006/main">
   <p:cSld>
     <p:spTree>
@@ -16464,14 +15992,14 @@
           <a:p>
             <a:fld id="{109C872D-39A9-4065-8BF3-6A613116E2A1}" type="slidenum">
               <a:rPr lang="ko-KR" altLang="en-US" smtClean="0"/>
-              <a:t>28</a:t>
+              <a:t>27</a:t>
             </a:fld>
             <a:endParaRPr lang="ko-KR" altLang="en-US"/>
           </a:p>
         </p:txBody>
       </p:sp>
-      <mc:AlternateContent xmlns:mc="http://schemas.openxmlformats.org/markup-compatibility/2006">
-        <mc:Choice xmlns:a14="http://schemas.microsoft.com/office/drawing/2010/main" Requires="a14">
+      <mc:AlternateContent xmlns:mc="http://schemas.openxmlformats.org/markup-compatibility/2006" xmlns:a14="http://schemas.microsoft.com/office/drawing/2010/main">
+        <mc:Choice Requires="a14">
           <p:sp>
             <p:nvSpPr>
               <p:cNvPr id="3" name="TextBox 2">
@@ -16761,7 +16289,7 @@
             </p:txBody>
           </p:sp>
         </mc:Choice>
-        <mc:Fallback>
+        <mc:Fallback xmlns="">
           <p:sp>
             <p:nvSpPr>
               <p:cNvPr id="3" name="TextBox 2">
@@ -16806,8 +16334,8 @@
           </p:sp>
         </mc:Fallback>
       </mc:AlternateContent>
-      <mc:AlternateContent xmlns:mc="http://schemas.openxmlformats.org/markup-compatibility/2006">
-        <mc:Choice xmlns:a14="http://schemas.microsoft.com/office/drawing/2010/main" Requires="a14">
+      <mc:AlternateContent xmlns:mc="http://schemas.openxmlformats.org/markup-compatibility/2006" xmlns:a14="http://schemas.microsoft.com/office/drawing/2010/main">
+        <mc:Choice Requires="a14">
           <p:sp>
             <p:nvSpPr>
               <p:cNvPr id="7" name="TextBox 6">
@@ -16923,7 +16451,7 @@
             </p:txBody>
           </p:sp>
         </mc:Choice>
-        <mc:Fallback>
+        <mc:Fallback xmlns="">
           <p:sp>
             <p:nvSpPr>
               <p:cNvPr id="7" name="TextBox 6">
@@ -16981,7 +16509,7 @@
 </p:sld>
 </file>
 
-<file path=ppt/slides/slide29.xml><?xml version="1.0" encoding="utf-8"?>
+<file path=ppt/slides/slide28.xml><?xml version="1.0" encoding="utf-8"?>
 <p:sld xmlns:a="http://schemas.openxmlformats.org/drawingml/2006/main" xmlns:r="http://schemas.openxmlformats.org/officeDocument/2006/relationships" xmlns:p="http://schemas.openxmlformats.org/presentationml/2006/main">
   <p:cSld>
     <p:spTree>
@@ -17050,14 +16578,14 @@
           <a:p>
             <a:fld id="{109C872D-39A9-4065-8BF3-6A613116E2A1}" type="slidenum">
               <a:rPr lang="ko-KR" altLang="en-US" smtClean="0"/>
-              <a:t>29</a:t>
+              <a:t>28</a:t>
             </a:fld>
             <a:endParaRPr lang="ko-KR" altLang="en-US"/>
           </a:p>
         </p:txBody>
       </p:sp>
-      <mc:AlternateContent xmlns:mc="http://schemas.openxmlformats.org/markup-compatibility/2006">
-        <mc:Choice xmlns:a14="http://schemas.microsoft.com/office/drawing/2010/main" Requires="a14">
+      <mc:AlternateContent xmlns:mc="http://schemas.openxmlformats.org/markup-compatibility/2006" xmlns:a14="http://schemas.microsoft.com/office/drawing/2010/main">
+        <mc:Choice Requires="a14">
           <p:sp>
             <p:nvSpPr>
               <p:cNvPr id="5" name="TextBox 4">
@@ -17262,7 +16790,7 @@
             </p:txBody>
           </p:sp>
         </mc:Choice>
-        <mc:Fallback>
+        <mc:Fallback xmlns="">
           <p:sp>
             <p:nvSpPr>
               <p:cNvPr id="5" name="TextBox 4">
@@ -17307,8 +16835,8 @@
           </p:sp>
         </mc:Fallback>
       </mc:AlternateContent>
-      <mc:AlternateContent xmlns:mc="http://schemas.openxmlformats.org/markup-compatibility/2006">
-        <mc:Choice xmlns:a14="http://schemas.microsoft.com/office/drawing/2010/main" Requires="a14">
+      <mc:AlternateContent xmlns:mc="http://schemas.openxmlformats.org/markup-compatibility/2006" xmlns:a14="http://schemas.microsoft.com/office/drawing/2010/main">
+        <mc:Choice Requires="a14">
           <p:sp>
             <p:nvSpPr>
               <p:cNvPr id="7" name="TextBox 6">
@@ -17424,7 +16952,7 @@
             </p:txBody>
           </p:sp>
         </mc:Choice>
-        <mc:Fallback>
+        <mc:Fallback xmlns="">
           <p:sp>
             <p:nvSpPr>
               <p:cNvPr id="7" name="TextBox 6">
@@ -17556,6 +17084,583 @@
     <p:extLst>
       <p:ext uri="{BB962C8B-B14F-4D97-AF65-F5344CB8AC3E}">
         <p14:creationId xmlns:p14="http://schemas.microsoft.com/office/powerpoint/2010/main" val="3488012513"/>
+      </p:ext>
+    </p:extLst>
+  </p:cSld>
+  <p:clrMapOvr>
+    <a:masterClrMapping/>
+  </p:clrMapOvr>
+</p:sld>
+</file>
+
+<file path=ppt/slides/slide29.xml><?xml version="1.0" encoding="utf-8"?>
+<p:sld xmlns:a="http://schemas.openxmlformats.org/drawingml/2006/main" xmlns:r="http://schemas.openxmlformats.org/officeDocument/2006/relationships" xmlns:p="http://schemas.openxmlformats.org/presentationml/2006/main">
+  <p:cSld>
+    <p:spTree>
+      <p:nvGrpSpPr>
+        <p:cNvPr id="1" name="">
+          <a:extLst>
+            <a:ext uri="{FF2B5EF4-FFF2-40B4-BE49-F238E27FC236}">
+              <a16:creationId xmlns:a16="http://schemas.microsoft.com/office/drawing/2014/main" id="{A362BCC7-59EF-833E-DBD2-6110DDE99D73}"/>
+            </a:ext>
+          </a:extLst>
+        </p:cNvPr>
+        <p:cNvGrpSpPr/>
+        <p:nvPr/>
+      </p:nvGrpSpPr>
+      <p:grpSpPr>
+        <a:xfrm>
+          <a:off x="0" y="0"/>
+          <a:ext cx="0" cy="0"/>
+          <a:chOff x="0" y="0"/>
+          <a:chExt cx="0" cy="0"/>
+        </a:xfrm>
+      </p:grpSpPr>
+      <p:sp>
+        <p:nvSpPr>
+          <p:cNvPr id="2" name="제목 1">
+            <a:extLst>
+              <a:ext uri="{FF2B5EF4-FFF2-40B4-BE49-F238E27FC236}">
+                <a16:creationId xmlns:a16="http://schemas.microsoft.com/office/drawing/2014/main" id="{9AEF7647-371F-D634-866E-202EC647FF43}"/>
+              </a:ext>
+            </a:extLst>
+          </p:cNvPr>
+          <p:cNvSpPr>
+            <a:spLocks noGrp="1"/>
+          </p:cNvSpPr>
+          <p:nvPr>
+            <p:ph type="title"/>
+          </p:nvPr>
+        </p:nvSpPr>
+        <p:spPr/>
+        <p:txBody>
+          <a:bodyPr/>
+          <a:lstStyle/>
+          <a:p>
+            <a:r>
+              <a:rPr lang="ko-KR" altLang="en-US" dirty="0" err="1"/>
+              <a:t>사회무차별곡선</a:t>
+            </a:r>
+            <a:endParaRPr lang="ko-KR" altLang="en-US" dirty="0"/>
+          </a:p>
+        </p:txBody>
+      </p:sp>
+      <p:sp>
+        <p:nvSpPr>
+          <p:cNvPr id="4" name="슬라이드 번호 개체 틀 3">
+            <a:extLst>
+              <a:ext uri="{FF2B5EF4-FFF2-40B4-BE49-F238E27FC236}">
+                <a16:creationId xmlns:a16="http://schemas.microsoft.com/office/drawing/2014/main" id="{7F8D3A74-9798-61A8-3F8A-5C06CDBE6D50}"/>
+              </a:ext>
+            </a:extLst>
+          </p:cNvPr>
+          <p:cNvSpPr>
+            <a:spLocks noGrp="1"/>
+          </p:cNvSpPr>
+          <p:nvPr>
+            <p:ph type="sldNum" sz="quarter" idx="12"/>
+          </p:nvPr>
+        </p:nvSpPr>
+        <p:spPr/>
+        <p:txBody>
+          <a:bodyPr/>
+          <a:lstStyle/>
+          <a:p>
+            <a:fld id="{109C872D-39A9-4065-8BF3-6A613116E2A1}" type="slidenum">
+              <a:rPr lang="ko-KR" altLang="en-US" smtClean="0"/>
+              <a:t>29</a:t>
+            </a:fld>
+            <a:endParaRPr lang="ko-KR" altLang="en-US"/>
+          </a:p>
+        </p:txBody>
+      </p:sp>
+      <p:sp>
+        <p:nvSpPr>
+          <p:cNvPr id="5" name="TextBox 4">
+            <a:extLst>
+              <a:ext uri="{FF2B5EF4-FFF2-40B4-BE49-F238E27FC236}">
+                <a16:creationId xmlns:a16="http://schemas.microsoft.com/office/drawing/2014/main" id="{B8BE37E6-0FC3-BDD4-D1F3-D17197F449A9}"/>
+              </a:ext>
+            </a:extLst>
+          </p:cNvPr>
+          <p:cNvSpPr txBox="1"/>
+          <p:nvPr/>
+        </p:nvSpPr>
+        <p:spPr>
+          <a:xfrm>
+            <a:off x="288790" y="958844"/>
+            <a:ext cx="11693660" cy="5215338"/>
+          </a:xfrm>
+          <a:prstGeom prst="rect">
+            <a:avLst/>
+          </a:prstGeom>
+          <a:noFill/>
+        </p:spPr>
+        <p:txBody>
+          <a:bodyPr wrap="square" rtlCol="0" anchor="t">
+            <a:spAutoFit/>
+          </a:bodyPr>
+          <a:lstStyle/>
+          <a:p>
+            <a:pPr marL="434975" indent="-342900">
+              <a:lnSpc>
+                <a:spcPct val="150000"/>
+              </a:lnSpc>
+              <a:buFont typeface="+mj-lt"/>
+              <a:buAutoNum type="arabicPeriod" startAt="2"/>
+            </a:pPr>
+            <a:r>
+              <a:rPr lang="ko-KR" altLang="en-US" sz="1600" b="1" spc="-50" dirty="0"/>
+              <a:t>평등주의적 가치판단</a:t>
+            </a:r>
+            <a:r>
+              <a:rPr lang="en-US" altLang="ko-KR" sz="1600" spc="-50" dirty="0"/>
+              <a:t>: </a:t>
+            </a:r>
+            <a:r>
+              <a:rPr lang="ko-KR" altLang="en-US" sz="1600" spc="-50" dirty="0"/>
+              <a:t>어떤 사람의 효용수준이 높을수록 더 작은 가중치를 적용하여 사회후생을 계산해야 한다는 개념이다</a:t>
+            </a:r>
+            <a:r>
+              <a:rPr lang="en-US" altLang="ko-KR" sz="1600" spc="-50" dirty="0"/>
+              <a:t>.</a:t>
+            </a:r>
+          </a:p>
+          <a:p>
+            <a:pPr marL="892175" lvl="1" indent="-342900">
+              <a:lnSpc>
+                <a:spcPct val="150000"/>
+              </a:lnSpc>
+              <a:buFont typeface="Wingdings" panose="05000000000000000000" pitchFamily="2" charset="2"/>
+              <a:buChar char="ü"/>
+            </a:pPr>
+            <a:r>
+              <a:rPr lang="ko-KR" altLang="en-US" sz="1600" spc="-50" dirty="0"/>
+              <a:t>부자들로부터 가난한 </a:t>
+            </a:r>
+            <a:r>
+              <a:rPr lang="ko-KR" altLang="en-US" sz="1600" spc="-50" dirty="0" err="1"/>
+              <a:t>사람들에게로</a:t>
+            </a:r>
+            <a:r>
+              <a:rPr lang="ko-KR" altLang="en-US" sz="1600" spc="-50" dirty="0"/>
+              <a:t> 소득을 재분배해야 한다는 주장의 유력한 근거가 된다</a:t>
+            </a:r>
+            <a:r>
+              <a:rPr lang="en-US" altLang="ko-KR" sz="1600" spc="-50" dirty="0"/>
+              <a:t>.</a:t>
+            </a:r>
+          </a:p>
+          <a:p>
+            <a:pPr marL="434975" indent="-342900">
+              <a:lnSpc>
+                <a:spcPct val="150000"/>
+              </a:lnSpc>
+              <a:buFont typeface="Arial" panose="020B0604020202020204" pitchFamily="34" charset="0"/>
+              <a:buChar char="•"/>
+            </a:pPr>
+            <a:r>
+              <a:rPr lang="ko-KR" altLang="en-US" sz="1600" spc="-50" dirty="0"/>
+              <a:t>평등주의적 가치판단을 반영한 </a:t>
+            </a:r>
+            <a:r>
+              <a:rPr lang="ko-KR" altLang="en-US" sz="1600" spc="-50" dirty="0" err="1"/>
+              <a:t>사회무차별곡선은</a:t>
+            </a:r>
+            <a:r>
+              <a:rPr lang="ko-KR" altLang="en-US" sz="1600" spc="-50" dirty="0"/>
+              <a:t> 아래와 같이 원점에 대해 볼록한 모양을 갖고 있다</a:t>
+            </a:r>
+            <a:r>
+              <a:rPr lang="en-US" altLang="ko-KR" sz="1600" spc="-50" dirty="0"/>
+              <a:t>.</a:t>
+            </a:r>
+          </a:p>
+          <a:p>
+            <a:pPr marL="892175" lvl="1" indent="-342900">
+              <a:lnSpc>
+                <a:spcPct val="150000"/>
+              </a:lnSpc>
+              <a:buFont typeface="Wingdings" panose="05000000000000000000" pitchFamily="2" charset="2"/>
+              <a:buChar char="ü"/>
+            </a:pPr>
+            <a:r>
+              <a:rPr lang="en-US" altLang="ko-KR" sz="1600" spc="-50" dirty="0"/>
+              <a:t>a</a:t>
+            </a:r>
+            <a:r>
+              <a:rPr lang="ko-KR" altLang="en-US" sz="1600" spc="-50" dirty="0"/>
+              <a:t>→</a:t>
+            </a:r>
+            <a:r>
+              <a:rPr lang="en-US" altLang="ko-KR" sz="1600" spc="-50" dirty="0"/>
+              <a:t>b</a:t>
+            </a:r>
+            <a:r>
+              <a:rPr lang="ko-KR" altLang="en-US" sz="1600" spc="-50" dirty="0"/>
+              <a:t>→</a:t>
+            </a:r>
+            <a:r>
+              <a:rPr lang="en-US" altLang="ko-KR" sz="1600" spc="-50" dirty="0"/>
+              <a:t>c </a:t>
+            </a:r>
+            <a:r>
+              <a:rPr lang="ko-KR" altLang="en-US" sz="1600" spc="-50" dirty="0"/>
+              <a:t>로 이동해 갈 때</a:t>
+            </a:r>
+            <a:r>
+              <a:rPr lang="en-US" altLang="ko-KR" sz="1600" spc="-50" dirty="0"/>
+              <a:t>, </a:t>
+            </a:r>
+            <a:r>
+              <a:rPr lang="ko-KR" altLang="en-US" sz="1600" spc="-50" dirty="0"/>
+              <a:t>그 곡선 기울기의 절대값이 </a:t>
+            </a:r>
+            <a:r>
+              <a:rPr lang="en-US" altLang="ko-KR" sz="1600" spc="-50" dirty="0"/>
+              <a:t>2</a:t>
+            </a:r>
+            <a:r>
+              <a:rPr lang="ko-KR" altLang="en-US" sz="1600" spc="-50" dirty="0"/>
+              <a:t>→</a:t>
+            </a:r>
+            <a:r>
+              <a:rPr lang="en-US" altLang="ko-KR" sz="1600" spc="-50" dirty="0"/>
+              <a:t>1</a:t>
+            </a:r>
+            <a:r>
+              <a:rPr lang="ko-KR" altLang="en-US" sz="1600" spc="-50" dirty="0"/>
+              <a:t>→</a:t>
+            </a:r>
+            <a:r>
+              <a:rPr lang="en-US" altLang="ko-KR" sz="1600" spc="-50" dirty="0"/>
+              <a:t>1/3 </a:t>
+            </a:r>
+            <a:r>
+              <a:rPr lang="ko-KR" altLang="en-US" sz="1600" spc="-50" dirty="0"/>
+              <a:t>의 크기로 작아진다</a:t>
+            </a:r>
+            <a:r>
+              <a:rPr lang="en-US" altLang="ko-KR" sz="1600" spc="-50" dirty="0"/>
+              <a:t>.</a:t>
+            </a:r>
+          </a:p>
+          <a:p>
+            <a:pPr marL="892175" lvl="1" indent="-342900">
+              <a:lnSpc>
+                <a:spcPct val="150000"/>
+              </a:lnSpc>
+              <a:buFont typeface="Wingdings" panose="05000000000000000000" pitchFamily="2" charset="2"/>
+              <a:buChar char="ü"/>
+            </a:pPr>
+            <a:r>
+              <a:rPr lang="en-US" altLang="ko-KR" sz="1600" spc="-50" dirty="0"/>
+              <a:t>A</a:t>
+            </a:r>
+            <a:r>
+              <a:rPr lang="ko-KR" altLang="en-US" sz="1600" spc="-50" dirty="0"/>
+              <a:t>점에서 </a:t>
+            </a:r>
+            <a:r>
+              <a:rPr lang="ko-KR" altLang="en-US" sz="1600" spc="-50" dirty="0" err="1"/>
+              <a:t>사회무차별곡선</a:t>
+            </a:r>
+            <a:r>
+              <a:rPr lang="ko-KR" altLang="en-US" sz="1600" spc="-50" dirty="0"/>
+              <a:t> 기울기의 절대값이 </a:t>
+            </a:r>
+            <a:r>
+              <a:rPr lang="en-US" altLang="ko-KR" sz="1600" spc="-50" dirty="0"/>
+              <a:t>2</a:t>
+            </a:r>
+            <a:r>
+              <a:rPr lang="ko-KR" altLang="en-US" sz="1600" spc="-50" dirty="0"/>
+              <a:t>라는 것은 </a:t>
+            </a:r>
+            <a:r>
+              <a:rPr lang="en-US" altLang="ko-KR" sz="1600" spc="-50" dirty="0"/>
+              <a:t>B</a:t>
+            </a:r>
+            <a:r>
+              <a:rPr lang="ko-KR" altLang="en-US" sz="1600" spc="-50" dirty="0"/>
+              <a:t>의 효용을 </a:t>
+            </a:r>
+            <a:r>
+              <a:rPr lang="en-US" altLang="ko-KR" sz="1600" spc="-50" dirty="0"/>
+              <a:t>2</a:t>
+            </a:r>
+            <a:r>
+              <a:rPr lang="ko-KR" altLang="en-US" sz="1600" spc="-50" dirty="0"/>
+              <a:t>단위 감소시키고 그 대신 </a:t>
+            </a:r>
+            <a:r>
+              <a:rPr lang="en-US" altLang="ko-KR" sz="1600" spc="-50" dirty="0"/>
+              <a:t>A</a:t>
+            </a:r>
+            <a:r>
+              <a:rPr lang="ko-KR" altLang="en-US" sz="1600" spc="-50" dirty="0"/>
+              <a:t>의 효용을 </a:t>
+            </a:r>
+            <a:r>
+              <a:rPr lang="en-US" altLang="ko-KR" sz="1600" spc="-50" dirty="0"/>
+              <a:t>1</a:t>
+            </a:r>
+            <a:r>
+              <a:rPr lang="ko-KR" altLang="en-US" sz="1600" spc="-50" dirty="0"/>
+              <a:t>단위 증가시키면 사회후생은 예전 수준에서 변함이 없다는 의미를 갖는다</a:t>
+            </a:r>
+            <a:r>
+              <a:rPr lang="en-US" altLang="ko-KR" sz="1600" spc="-50" dirty="0"/>
+              <a:t>.</a:t>
+            </a:r>
+          </a:p>
+          <a:p>
+            <a:pPr marL="1349375" lvl="2" indent="-342900">
+              <a:lnSpc>
+                <a:spcPct val="150000"/>
+              </a:lnSpc>
+              <a:buFont typeface="Wingdings" panose="05000000000000000000" pitchFamily="2" charset="2"/>
+              <a:buChar char="Ø"/>
+            </a:pPr>
+            <a:r>
+              <a:rPr lang="en-US" altLang="ko-KR" sz="1600" spc="-50" dirty="0"/>
+              <a:t>A</a:t>
+            </a:r>
+            <a:r>
+              <a:rPr lang="ko-KR" altLang="en-US" sz="1600" spc="-50" dirty="0"/>
+              <a:t>점에서는 </a:t>
+            </a:r>
+            <a:r>
+              <a:rPr lang="en-US" altLang="ko-KR" sz="1600" spc="-50" dirty="0"/>
+              <a:t>A</a:t>
+            </a:r>
+            <a:r>
+              <a:rPr lang="ko-KR" altLang="en-US" sz="1600" spc="-50" dirty="0"/>
+              <a:t>의 한계효용 </a:t>
+            </a:r>
+            <a:r>
+              <a:rPr lang="en-US" altLang="ko-KR" sz="1600" spc="-50" dirty="0"/>
+              <a:t>1</a:t>
+            </a:r>
+            <a:r>
+              <a:rPr lang="ko-KR" altLang="en-US" sz="1600" spc="-50" dirty="0"/>
+              <a:t>단위가 </a:t>
+            </a:r>
+            <a:r>
+              <a:rPr lang="en-US" altLang="ko-KR" sz="1600" spc="-50" dirty="0"/>
+              <a:t>B</a:t>
+            </a:r>
+            <a:r>
+              <a:rPr lang="ko-KR" altLang="en-US" sz="1600" spc="-50" dirty="0"/>
+              <a:t>의 효용</a:t>
+            </a:r>
+            <a:r>
+              <a:rPr lang="en-US" altLang="ko-KR" sz="1600" spc="-50" dirty="0"/>
+              <a:t>1</a:t>
+            </a:r>
+            <a:r>
+              <a:rPr lang="ko-KR" altLang="en-US" sz="1600" spc="-50" dirty="0"/>
+              <a:t>단위보다 </a:t>
+            </a:r>
+            <a:r>
+              <a:rPr lang="en-US" altLang="ko-KR" sz="1600" spc="-50" dirty="0"/>
+              <a:t>2</a:t>
+            </a:r>
+            <a:r>
+              <a:rPr lang="ko-KR" altLang="en-US" sz="1600" spc="-50" dirty="0"/>
+              <a:t>배 더 큰 사회적 중요성을 갖고 있다는 뜻과 같다</a:t>
+            </a:r>
+            <a:r>
+              <a:rPr lang="en-US" altLang="ko-KR" sz="1600" spc="-50" dirty="0"/>
+              <a:t>.</a:t>
+            </a:r>
+          </a:p>
+          <a:p>
+            <a:pPr marL="892175" lvl="1" indent="-342900">
+              <a:lnSpc>
+                <a:spcPct val="150000"/>
+              </a:lnSpc>
+              <a:buFont typeface="Wingdings" panose="05000000000000000000" pitchFamily="2" charset="2"/>
+              <a:buChar char="ü"/>
+            </a:pPr>
+            <a:r>
+              <a:rPr lang="en-US" altLang="ko-KR" sz="1600" spc="-50" dirty="0"/>
+              <a:t>a</a:t>
+            </a:r>
+            <a:r>
+              <a:rPr lang="ko-KR" altLang="en-US" sz="1600" spc="-50" dirty="0"/>
+              <a:t>에서 </a:t>
+            </a:r>
+            <a:r>
+              <a:rPr lang="en-US" altLang="ko-KR" sz="1600" spc="-50" dirty="0"/>
+              <a:t>c</a:t>
+            </a:r>
+            <a:r>
+              <a:rPr lang="ko-KR" altLang="en-US" sz="1600" spc="-50" dirty="0"/>
+              <a:t>점으로 이동함에 따라 기울기가 완만해지면서</a:t>
+            </a:r>
+            <a:r>
+              <a:rPr lang="en-US" altLang="ko-KR" sz="1600" spc="-50" dirty="0"/>
+              <a:t> A</a:t>
+            </a:r>
+            <a:r>
+              <a:rPr lang="ko-KR" altLang="en-US" sz="1600" spc="-50" dirty="0"/>
+              <a:t>의 한계효용이 갖는 상대적 중요성은 점차 작아진다</a:t>
+            </a:r>
+            <a:r>
+              <a:rPr lang="en-US" altLang="ko-KR" sz="1600" spc="-50" dirty="0"/>
+              <a:t>.</a:t>
+            </a:r>
+          </a:p>
+          <a:p>
+            <a:pPr marL="892175" lvl="1" indent="-342900">
+              <a:lnSpc>
+                <a:spcPct val="150000"/>
+              </a:lnSpc>
+              <a:buFont typeface="Wingdings" panose="05000000000000000000" pitchFamily="2" charset="2"/>
+              <a:buChar char="ü"/>
+            </a:pPr>
+            <a:endParaRPr lang="en-US" altLang="ko-KR" sz="1600" spc="-50" dirty="0"/>
+          </a:p>
+          <a:p>
+            <a:pPr marL="1349375" lvl="2" indent="-342900">
+              <a:lnSpc>
+                <a:spcPct val="150000"/>
+              </a:lnSpc>
+              <a:buFont typeface="Wingdings" panose="05000000000000000000" pitchFamily="2" charset="2"/>
+              <a:buChar char="Ø"/>
+            </a:pPr>
+            <a:endParaRPr lang="en-US" altLang="ko-KR" sz="1600" spc="-50" dirty="0"/>
+          </a:p>
+          <a:p>
+            <a:pPr marL="1349375" lvl="2" indent="-342900">
+              <a:lnSpc>
+                <a:spcPct val="150000"/>
+              </a:lnSpc>
+              <a:buFont typeface="Wingdings" panose="05000000000000000000" pitchFamily="2" charset="2"/>
+              <a:buChar char="Ø"/>
+            </a:pPr>
+            <a:endParaRPr lang="en-US" altLang="ko-KR" sz="1600" spc="-50" dirty="0"/>
+          </a:p>
+          <a:p>
+            <a:pPr marL="892175" lvl="1" indent="-342900">
+              <a:lnSpc>
+                <a:spcPct val="150000"/>
+              </a:lnSpc>
+              <a:buFont typeface="Wingdings" panose="05000000000000000000" pitchFamily="2" charset="2"/>
+              <a:buChar char="ü"/>
+            </a:pPr>
+            <a:endParaRPr lang="en-US" altLang="ko-KR" sz="1600" spc="-50" dirty="0"/>
+          </a:p>
+          <a:p>
+            <a:pPr marL="892175" lvl="1" indent="-342900">
+              <a:lnSpc>
+                <a:spcPct val="150000"/>
+              </a:lnSpc>
+              <a:buFont typeface="+mj-lt"/>
+              <a:buAutoNum type="arabicPeriod"/>
+            </a:pPr>
+            <a:endParaRPr lang="en-US" altLang="ko-KR" sz="1600" spc="-50" dirty="0"/>
+          </a:p>
+          <a:p>
+            <a:pPr marL="892175" lvl="1" indent="-342900">
+              <a:lnSpc>
+                <a:spcPct val="150000"/>
+              </a:lnSpc>
+              <a:buFont typeface="+mj-lt"/>
+              <a:buAutoNum type="arabicPeriod"/>
+            </a:pPr>
+            <a:endParaRPr lang="en-US" altLang="ko-KR" sz="1600" spc="-50" dirty="0"/>
+          </a:p>
+        </p:txBody>
+      </p:sp>
+      <p:sp>
+        <p:nvSpPr>
+          <p:cNvPr id="10" name="TextBox 9">
+            <a:extLst>
+              <a:ext uri="{FF2B5EF4-FFF2-40B4-BE49-F238E27FC236}">
+                <a16:creationId xmlns:a16="http://schemas.microsoft.com/office/drawing/2014/main" id="{906A6351-BF9E-8349-1C53-AC1857AFBED0}"/>
+              </a:ext>
+            </a:extLst>
+          </p:cNvPr>
+          <p:cNvSpPr txBox="1"/>
+          <p:nvPr/>
+        </p:nvSpPr>
+        <p:spPr>
+          <a:xfrm>
+            <a:off x="3604871" y="4204877"/>
+            <a:ext cx="3353796" cy="307777"/>
+          </a:xfrm>
+          <a:prstGeom prst="rect">
+            <a:avLst/>
+          </a:prstGeom>
+          <a:noFill/>
+        </p:spPr>
+        <p:txBody>
+          <a:bodyPr wrap="square">
+            <a:spAutoFit/>
+          </a:bodyPr>
+          <a:lstStyle/>
+          <a:p>
+            <a:pPr algn="ctr"/>
+            <a:r>
+              <a:rPr lang="en-US" altLang="ko-KR" sz="1400" spc="-50" dirty="0"/>
+              <a:t>&lt;</a:t>
+            </a:r>
+            <a:r>
+              <a:rPr lang="ko-KR" altLang="en-US" sz="1400" spc="-50" dirty="0" err="1"/>
+              <a:t>사회무차별곡선</a:t>
+            </a:r>
+            <a:r>
+              <a:rPr lang="en-US" altLang="ko-KR" sz="1400" spc="-50" dirty="0"/>
+              <a:t>: </a:t>
+            </a:r>
+            <a:r>
+              <a:rPr lang="ko-KR" altLang="en-US" sz="1400" spc="-50" dirty="0"/>
+              <a:t>공리주의적 가치판단</a:t>
+            </a:r>
+            <a:r>
+              <a:rPr lang="en-US" altLang="ko-KR" sz="1400" spc="-50" dirty="0"/>
+              <a:t>&gt;</a:t>
+            </a:r>
+            <a:endParaRPr lang="ko-KR" altLang="en-US" sz="1400" dirty="0"/>
+          </a:p>
+        </p:txBody>
+      </p:sp>
+      <p:pic>
+        <p:nvPicPr>
+          <p:cNvPr id="6" name="그림 5" descr="텍스트, 폰트, 라인, 도표이(가) 표시된 사진&#10;&#10;AI 생성 콘텐츠는 정확하지 않을 수 있습니다.">
+            <a:extLst>
+              <a:ext uri="{FF2B5EF4-FFF2-40B4-BE49-F238E27FC236}">
+                <a16:creationId xmlns:a16="http://schemas.microsoft.com/office/drawing/2014/main" id="{E8F11263-CE85-D185-A07A-DBEB37FC428B}"/>
+              </a:ext>
+            </a:extLst>
+          </p:cNvPr>
+          <p:cNvPicPr>
+            <a:picLocks noChangeAspect="1"/>
+          </p:cNvPicPr>
+          <p:nvPr/>
+        </p:nvPicPr>
+        <p:blipFill>
+          <a:blip r:embed="rId2"/>
+          <a:stretch>
+            <a:fillRect/>
+          </a:stretch>
+        </p:blipFill>
+        <p:spPr>
+          <a:xfrm>
+            <a:off x="4093829" y="4611126"/>
+            <a:ext cx="2676936" cy="2000774"/>
+          </a:xfrm>
+          <a:prstGeom prst="rect">
+            <a:avLst/>
+          </a:prstGeom>
+        </p:spPr>
+      </p:pic>
+    </p:spTree>
+    <p:extLst>
+      <p:ext uri="{BB962C8B-B14F-4D97-AF65-F5344CB8AC3E}">
+        <p14:creationId xmlns:p14="http://schemas.microsoft.com/office/powerpoint/2010/main" val="4005686573"/>
       </p:ext>
     </p:extLst>
   </p:cSld>
@@ -17716,583 +17821,6 @@
         <p:cNvPr id="1" name="">
           <a:extLst>
             <a:ext uri="{FF2B5EF4-FFF2-40B4-BE49-F238E27FC236}">
-              <a16:creationId xmlns:a16="http://schemas.microsoft.com/office/drawing/2014/main" id="{A362BCC7-59EF-833E-DBD2-6110DDE99D73}"/>
-            </a:ext>
-          </a:extLst>
-        </p:cNvPr>
-        <p:cNvGrpSpPr/>
-        <p:nvPr/>
-      </p:nvGrpSpPr>
-      <p:grpSpPr>
-        <a:xfrm>
-          <a:off x="0" y="0"/>
-          <a:ext cx="0" cy="0"/>
-          <a:chOff x="0" y="0"/>
-          <a:chExt cx="0" cy="0"/>
-        </a:xfrm>
-      </p:grpSpPr>
-      <p:sp>
-        <p:nvSpPr>
-          <p:cNvPr id="2" name="제목 1">
-            <a:extLst>
-              <a:ext uri="{FF2B5EF4-FFF2-40B4-BE49-F238E27FC236}">
-                <a16:creationId xmlns:a16="http://schemas.microsoft.com/office/drawing/2014/main" id="{9AEF7647-371F-D634-866E-202EC647FF43}"/>
-              </a:ext>
-            </a:extLst>
-          </p:cNvPr>
-          <p:cNvSpPr>
-            <a:spLocks noGrp="1"/>
-          </p:cNvSpPr>
-          <p:nvPr>
-            <p:ph type="title"/>
-          </p:nvPr>
-        </p:nvSpPr>
-        <p:spPr/>
-        <p:txBody>
-          <a:bodyPr/>
-          <a:lstStyle/>
-          <a:p>
-            <a:r>
-              <a:rPr lang="ko-KR" altLang="en-US" dirty="0" err="1"/>
-              <a:t>사회무차별곡선</a:t>
-            </a:r>
-            <a:endParaRPr lang="ko-KR" altLang="en-US" dirty="0"/>
-          </a:p>
-        </p:txBody>
-      </p:sp>
-      <p:sp>
-        <p:nvSpPr>
-          <p:cNvPr id="4" name="슬라이드 번호 개체 틀 3">
-            <a:extLst>
-              <a:ext uri="{FF2B5EF4-FFF2-40B4-BE49-F238E27FC236}">
-                <a16:creationId xmlns:a16="http://schemas.microsoft.com/office/drawing/2014/main" id="{7F8D3A74-9798-61A8-3F8A-5C06CDBE6D50}"/>
-              </a:ext>
-            </a:extLst>
-          </p:cNvPr>
-          <p:cNvSpPr>
-            <a:spLocks noGrp="1"/>
-          </p:cNvSpPr>
-          <p:nvPr>
-            <p:ph type="sldNum" sz="quarter" idx="12"/>
-          </p:nvPr>
-        </p:nvSpPr>
-        <p:spPr/>
-        <p:txBody>
-          <a:bodyPr/>
-          <a:lstStyle/>
-          <a:p>
-            <a:fld id="{109C872D-39A9-4065-8BF3-6A613116E2A1}" type="slidenum">
-              <a:rPr lang="ko-KR" altLang="en-US" smtClean="0"/>
-              <a:t>30</a:t>
-            </a:fld>
-            <a:endParaRPr lang="ko-KR" altLang="en-US"/>
-          </a:p>
-        </p:txBody>
-      </p:sp>
-      <p:sp>
-        <p:nvSpPr>
-          <p:cNvPr id="5" name="TextBox 4">
-            <a:extLst>
-              <a:ext uri="{FF2B5EF4-FFF2-40B4-BE49-F238E27FC236}">
-                <a16:creationId xmlns:a16="http://schemas.microsoft.com/office/drawing/2014/main" id="{B8BE37E6-0FC3-BDD4-D1F3-D17197F449A9}"/>
-              </a:ext>
-            </a:extLst>
-          </p:cNvPr>
-          <p:cNvSpPr txBox="1"/>
-          <p:nvPr/>
-        </p:nvSpPr>
-        <p:spPr>
-          <a:xfrm>
-            <a:off x="288790" y="958844"/>
-            <a:ext cx="11693660" cy="5215338"/>
-          </a:xfrm>
-          <a:prstGeom prst="rect">
-            <a:avLst/>
-          </a:prstGeom>
-          <a:noFill/>
-        </p:spPr>
-        <p:txBody>
-          <a:bodyPr wrap="square" rtlCol="0" anchor="t">
-            <a:spAutoFit/>
-          </a:bodyPr>
-          <a:lstStyle/>
-          <a:p>
-            <a:pPr marL="434975" indent="-342900">
-              <a:lnSpc>
-                <a:spcPct val="150000"/>
-              </a:lnSpc>
-              <a:buFont typeface="+mj-lt"/>
-              <a:buAutoNum type="arabicPeriod" startAt="2"/>
-            </a:pPr>
-            <a:r>
-              <a:rPr lang="ko-KR" altLang="en-US" sz="1600" b="1" spc="-50" dirty="0"/>
-              <a:t>평등주의적 가치판단</a:t>
-            </a:r>
-            <a:r>
-              <a:rPr lang="en-US" altLang="ko-KR" sz="1600" spc="-50" dirty="0"/>
-              <a:t>: </a:t>
-            </a:r>
-            <a:r>
-              <a:rPr lang="ko-KR" altLang="en-US" sz="1600" spc="-50" dirty="0"/>
-              <a:t>어떤 사람의 효용수준이 높을수록 더 작은 가중치를 적용하여 사회후생을 계산해야 한다는 개념이다</a:t>
-            </a:r>
-            <a:r>
-              <a:rPr lang="en-US" altLang="ko-KR" sz="1600" spc="-50" dirty="0"/>
-              <a:t>.</a:t>
-            </a:r>
-          </a:p>
-          <a:p>
-            <a:pPr marL="892175" lvl="1" indent="-342900">
-              <a:lnSpc>
-                <a:spcPct val="150000"/>
-              </a:lnSpc>
-              <a:buFont typeface="Wingdings" panose="05000000000000000000" pitchFamily="2" charset="2"/>
-              <a:buChar char="ü"/>
-            </a:pPr>
-            <a:r>
-              <a:rPr lang="ko-KR" altLang="en-US" sz="1600" spc="-50" dirty="0"/>
-              <a:t>부자들로부터 가난한 </a:t>
-            </a:r>
-            <a:r>
-              <a:rPr lang="ko-KR" altLang="en-US" sz="1600" spc="-50" dirty="0" err="1"/>
-              <a:t>사람들에게로</a:t>
-            </a:r>
-            <a:r>
-              <a:rPr lang="ko-KR" altLang="en-US" sz="1600" spc="-50" dirty="0"/>
-              <a:t> 소득을 재분배해야 한다는 주장의 유력한 근거가 된다</a:t>
-            </a:r>
-            <a:r>
-              <a:rPr lang="en-US" altLang="ko-KR" sz="1600" spc="-50" dirty="0"/>
-              <a:t>.</a:t>
-            </a:r>
-          </a:p>
-          <a:p>
-            <a:pPr marL="434975" indent="-342900">
-              <a:lnSpc>
-                <a:spcPct val="150000"/>
-              </a:lnSpc>
-              <a:buFont typeface="Arial" panose="020B0604020202020204" pitchFamily="34" charset="0"/>
-              <a:buChar char="•"/>
-            </a:pPr>
-            <a:r>
-              <a:rPr lang="ko-KR" altLang="en-US" sz="1600" spc="-50" dirty="0"/>
-              <a:t>평등주의적 가치판단을 반영한 </a:t>
-            </a:r>
-            <a:r>
-              <a:rPr lang="ko-KR" altLang="en-US" sz="1600" spc="-50" dirty="0" err="1"/>
-              <a:t>사회무차별곡선은</a:t>
-            </a:r>
-            <a:r>
-              <a:rPr lang="ko-KR" altLang="en-US" sz="1600" spc="-50" dirty="0"/>
-              <a:t> 아래와 같이 원점에 대해 볼록한 모양을 갖고 있다</a:t>
-            </a:r>
-            <a:r>
-              <a:rPr lang="en-US" altLang="ko-KR" sz="1600" spc="-50" dirty="0"/>
-              <a:t>.</a:t>
-            </a:r>
-          </a:p>
-          <a:p>
-            <a:pPr marL="892175" lvl="1" indent="-342900">
-              <a:lnSpc>
-                <a:spcPct val="150000"/>
-              </a:lnSpc>
-              <a:buFont typeface="Wingdings" panose="05000000000000000000" pitchFamily="2" charset="2"/>
-              <a:buChar char="ü"/>
-            </a:pPr>
-            <a:r>
-              <a:rPr lang="en-US" altLang="ko-KR" sz="1600" spc="-50" dirty="0"/>
-              <a:t>a</a:t>
-            </a:r>
-            <a:r>
-              <a:rPr lang="ko-KR" altLang="en-US" sz="1600" spc="-50" dirty="0"/>
-              <a:t>→</a:t>
-            </a:r>
-            <a:r>
-              <a:rPr lang="en-US" altLang="ko-KR" sz="1600" spc="-50" dirty="0"/>
-              <a:t>b</a:t>
-            </a:r>
-            <a:r>
-              <a:rPr lang="ko-KR" altLang="en-US" sz="1600" spc="-50" dirty="0"/>
-              <a:t>→</a:t>
-            </a:r>
-            <a:r>
-              <a:rPr lang="en-US" altLang="ko-KR" sz="1600" spc="-50" dirty="0"/>
-              <a:t>c </a:t>
-            </a:r>
-            <a:r>
-              <a:rPr lang="ko-KR" altLang="en-US" sz="1600" spc="-50" dirty="0"/>
-              <a:t>로 이동해 갈 때</a:t>
-            </a:r>
-            <a:r>
-              <a:rPr lang="en-US" altLang="ko-KR" sz="1600" spc="-50" dirty="0"/>
-              <a:t>, </a:t>
-            </a:r>
-            <a:r>
-              <a:rPr lang="ko-KR" altLang="en-US" sz="1600" spc="-50" dirty="0"/>
-              <a:t>그 곡선 기울기의 절대값이 </a:t>
-            </a:r>
-            <a:r>
-              <a:rPr lang="en-US" altLang="ko-KR" sz="1600" spc="-50" dirty="0"/>
-              <a:t>2</a:t>
-            </a:r>
-            <a:r>
-              <a:rPr lang="ko-KR" altLang="en-US" sz="1600" spc="-50" dirty="0"/>
-              <a:t>→</a:t>
-            </a:r>
-            <a:r>
-              <a:rPr lang="en-US" altLang="ko-KR" sz="1600" spc="-50" dirty="0"/>
-              <a:t>1</a:t>
-            </a:r>
-            <a:r>
-              <a:rPr lang="ko-KR" altLang="en-US" sz="1600" spc="-50" dirty="0"/>
-              <a:t>→</a:t>
-            </a:r>
-            <a:r>
-              <a:rPr lang="en-US" altLang="ko-KR" sz="1600" spc="-50" dirty="0"/>
-              <a:t>1/3 </a:t>
-            </a:r>
-            <a:r>
-              <a:rPr lang="ko-KR" altLang="en-US" sz="1600" spc="-50" dirty="0"/>
-              <a:t>의 크기로 작아진다</a:t>
-            </a:r>
-            <a:r>
-              <a:rPr lang="en-US" altLang="ko-KR" sz="1600" spc="-50" dirty="0"/>
-              <a:t>.</a:t>
-            </a:r>
-          </a:p>
-          <a:p>
-            <a:pPr marL="892175" lvl="1" indent="-342900">
-              <a:lnSpc>
-                <a:spcPct val="150000"/>
-              </a:lnSpc>
-              <a:buFont typeface="Wingdings" panose="05000000000000000000" pitchFamily="2" charset="2"/>
-              <a:buChar char="ü"/>
-            </a:pPr>
-            <a:r>
-              <a:rPr lang="en-US" altLang="ko-KR" sz="1600" spc="-50" dirty="0"/>
-              <a:t>A</a:t>
-            </a:r>
-            <a:r>
-              <a:rPr lang="ko-KR" altLang="en-US" sz="1600" spc="-50" dirty="0"/>
-              <a:t>점에서 </a:t>
-            </a:r>
-            <a:r>
-              <a:rPr lang="ko-KR" altLang="en-US" sz="1600" spc="-50" dirty="0" err="1"/>
-              <a:t>사회무차별곡선</a:t>
-            </a:r>
-            <a:r>
-              <a:rPr lang="ko-KR" altLang="en-US" sz="1600" spc="-50" dirty="0"/>
-              <a:t> 기울기의 절대값이 </a:t>
-            </a:r>
-            <a:r>
-              <a:rPr lang="en-US" altLang="ko-KR" sz="1600" spc="-50" dirty="0"/>
-              <a:t>2</a:t>
-            </a:r>
-            <a:r>
-              <a:rPr lang="ko-KR" altLang="en-US" sz="1600" spc="-50" dirty="0"/>
-              <a:t>라는 것은 </a:t>
-            </a:r>
-            <a:r>
-              <a:rPr lang="en-US" altLang="ko-KR" sz="1600" spc="-50" dirty="0"/>
-              <a:t>B</a:t>
-            </a:r>
-            <a:r>
-              <a:rPr lang="ko-KR" altLang="en-US" sz="1600" spc="-50" dirty="0"/>
-              <a:t>의 효용을 </a:t>
-            </a:r>
-            <a:r>
-              <a:rPr lang="en-US" altLang="ko-KR" sz="1600" spc="-50" dirty="0"/>
-              <a:t>2</a:t>
-            </a:r>
-            <a:r>
-              <a:rPr lang="ko-KR" altLang="en-US" sz="1600" spc="-50" dirty="0"/>
-              <a:t>단위 감소시키고 그 대신 </a:t>
-            </a:r>
-            <a:r>
-              <a:rPr lang="en-US" altLang="ko-KR" sz="1600" spc="-50" dirty="0"/>
-              <a:t>A</a:t>
-            </a:r>
-            <a:r>
-              <a:rPr lang="ko-KR" altLang="en-US" sz="1600" spc="-50" dirty="0"/>
-              <a:t>의 효용을 </a:t>
-            </a:r>
-            <a:r>
-              <a:rPr lang="en-US" altLang="ko-KR" sz="1600" spc="-50" dirty="0"/>
-              <a:t>1</a:t>
-            </a:r>
-            <a:r>
-              <a:rPr lang="ko-KR" altLang="en-US" sz="1600" spc="-50" dirty="0"/>
-              <a:t>단위 증가시키면 사회후생은 예전 수준에서 변함이 없다는 의미를 갖는다</a:t>
-            </a:r>
-            <a:r>
-              <a:rPr lang="en-US" altLang="ko-KR" sz="1600" spc="-50" dirty="0"/>
-              <a:t>.</a:t>
-            </a:r>
-          </a:p>
-          <a:p>
-            <a:pPr marL="1349375" lvl="2" indent="-342900">
-              <a:lnSpc>
-                <a:spcPct val="150000"/>
-              </a:lnSpc>
-              <a:buFont typeface="Wingdings" panose="05000000000000000000" pitchFamily="2" charset="2"/>
-              <a:buChar char="Ø"/>
-            </a:pPr>
-            <a:r>
-              <a:rPr lang="en-US" altLang="ko-KR" sz="1600" spc="-50" dirty="0"/>
-              <a:t>A</a:t>
-            </a:r>
-            <a:r>
-              <a:rPr lang="ko-KR" altLang="en-US" sz="1600" spc="-50" dirty="0"/>
-              <a:t>점에서는 </a:t>
-            </a:r>
-            <a:r>
-              <a:rPr lang="en-US" altLang="ko-KR" sz="1600" spc="-50" dirty="0"/>
-              <a:t>A</a:t>
-            </a:r>
-            <a:r>
-              <a:rPr lang="ko-KR" altLang="en-US" sz="1600" spc="-50" dirty="0"/>
-              <a:t>의 한계효용 </a:t>
-            </a:r>
-            <a:r>
-              <a:rPr lang="en-US" altLang="ko-KR" sz="1600" spc="-50" dirty="0"/>
-              <a:t>1</a:t>
-            </a:r>
-            <a:r>
-              <a:rPr lang="ko-KR" altLang="en-US" sz="1600" spc="-50" dirty="0"/>
-              <a:t>단위가 </a:t>
-            </a:r>
-            <a:r>
-              <a:rPr lang="en-US" altLang="ko-KR" sz="1600" spc="-50" dirty="0"/>
-              <a:t>B</a:t>
-            </a:r>
-            <a:r>
-              <a:rPr lang="ko-KR" altLang="en-US" sz="1600" spc="-50" dirty="0"/>
-              <a:t>의 효용</a:t>
-            </a:r>
-            <a:r>
-              <a:rPr lang="en-US" altLang="ko-KR" sz="1600" spc="-50" dirty="0"/>
-              <a:t>1</a:t>
-            </a:r>
-            <a:r>
-              <a:rPr lang="ko-KR" altLang="en-US" sz="1600" spc="-50" dirty="0"/>
-              <a:t>단위보다 </a:t>
-            </a:r>
-            <a:r>
-              <a:rPr lang="en-US" altLang="ko-KR" sz="1600" spc="-50" dirty="0"/>
-              <a:t>2</a:t>
-            </a:r>
-            <a:r>
-              <a:rPr lang="ko-KR" altLang="en-US" sz="1600" spc="-50" dirty="0"/>
-              <a:t>배 더 큰 사회적 중요성을 갖고 있다는 뜻과 같다</a:t>
-            </a:r>
-            <a:r>
-              <a:rPr lang="en-US" altLang="ko-KR" sz="1600" spc="-50" dirty="0"/>
-              <a:t>.</a:t>
-            </a:r>
-          </a:p>
-          <a:p>
-            <a:pPr marL="892175" lvl="1" indent="-342900">
-              <a:lnSpc>
-                <a:spcPct val="150000"/>
-              </a:lnSpc>
-              <a:buFont typeface="Wingdings" panose="05000000000000000000" pitchFamily="2" charset="2"/>
-              <a:buChar char="ü"/>
-            </a:pPr>
-            <a:r>
-              <a:rPr lang="en-US" altLang="ko-KR" sz="1600" spc="-50" dirty="0"/>
-              <a:t>a</a:t>
-            </a:r>
-            <a:r>
-              <a:rPr lang="ko-KR" altLang="en-US" sz="1600" spc="-50" dirty="0"/>
-              <a:t>에서 </a:t>
-            </a:r>
-            <a:r>
-              <a:rPr lang="en-US" altLang="ko-KR" sz="1600" spc="-50" dirty="0"/>
-              <a:t>c</a:t>
-            </a:r>
-            <a:r>
-              <a:rPr lang="ko-KR" altLang="en-US" sz="1600" spc="-50" dirty="0"/>
-              <a:t>점으로 이동함에 따라 기울기가 완만해지면서</a:t>
-            </a:r>
-            <a:r>
-              <a:rPr lang="en-US" altLang="ko-KR" sz="1600" spc="-50" dirty="0"/>
-              <a:t> A</a:t>
-            </a:r>
-            <a:r>
-              <a:rPr lang="ko-KR" altLang="en-US" sz="1600" spc="-50" dirty="0"/>
-              <a:t>의 한계효용이 갖는 상대적 중요성은 점차 작아진다</a:t>
-            </a:r>
-            <a:r>
-              <a:rPr lang="en-US" altLang="ko-KR" sz="1600" spc="-50" dirty="0"/>
-              <a:t>.</a:t>
-            </a:r>
-          </a:p>
-          <a:p>
-            <a:pPr marL="892175" lvl="1" indent="-342900">
-              <a:lnSpc>
-                <a:spcPct val="150000"/>
-              </a:lnSpc>
-              <a:buFont typeface="Wingdings" panose="05000000000000000000" pitchFamily="2" charset="2"/>
-              <a:buChar char="ü"/>
-            </a:pPr>
-            <a:endParaRPr lang="en-US" altLang="ko-KR" sz="1600" spc="-50" dirty="0"/>
-          </a:p>
-          <a:p>
-            <a:pPr marL="1349375" lvl="2" indent="-342900">
-              <a:lnSpc>
-                <a:spcPct val="150000"/>
-              </a:lnSpc>
-              <a:buFont typeface="Wingdings" panose="05000000000000000000" pitchFamily="2" charset="2"/>
-              <a:buChar char="Ø"/>
-            </a:pPr>
-            <a:endParaRPr lang="en-US" altLang="ko-KR" sz="1600" spc="-50" dirty="0"/>
-          </a:p>
-          <a:p>
-            <a:pPr marL="1349375" lvl="2" indent="-342900">
-              <a:lnSpc>
-                <a:spcPct val="150000"/>
-              </a:lnSpc>
-              <a:buFont typeface="Wingdings" panose="05000000000000000000" pitchFamily="2" charset="2"/>
-              <a:buChar char="Ø"/>
-            </a:pPr>
-            <a:endParaRPr lang="en-US" altLang="ko-KR" sz="1600" spc="-50" dirty="0"/>
-          </a:p>
-          <a:p>
-            <a:pPr marL="892175" lvl="1" indent="-342900">
-              <a:lnSpc>
-                <a:spcPct val="150000"/>
-              </a:lnSpc>
-              <a:buFont typeface="Wingdings" panose="05000000000000000000" pitchFamily="2" charset="2"/>
-              <a:buChar char="ü"/>
-            </a:pPr>
-            <a:endParaRPr lang="en-US" altLang="ko-KR" sz="1600" spc="-50" dirty="0"/>
-          </a:p>
-          <a:p>
-            <a:pPr marL="892175" lvl="1" indent="-342900">
-              <a:lnSpc>
-                <a:spcPct val="150000"/>
-              </a:lnSpc>
-              <a:buFont typeface="+mj-lt"/>
-              <a:buAutoNum type="arabicPeriod"/>
-            </a:pPr>
-            <a:endParaRPr lang="en-US" altLang="ko-KR" sz="1600" spc="-50" dirty="0"/>
-          </a:p>
-          <a:p>
-            <a:pPr marL="892175" lvl="1" indent="-342900">
-              <a:lnSpc>
-                <a:spcPct val="150000"/>
-              </a:lnSpc>
-              <a:buFont typeface="+mj-lt"/>
-              <a:buAutoNum type="arabicPeriod"/>
-            </a:pPr>
-            <a:endParaRPr lang="en-US" altLang="ko-KR" sz="1600" spc="-50" dirty="0"/>
-          </a:p>
-        </p:txBody>
-      </p:sp>
-      <p:sp>
-        <p:nvSpPr>
-          <p:cNvPr id="10" name="TextBox 9">
-            <a:extLst>
-              <a:ext uri="{FF2B5EF4-FFF2-40B4-BE49-F238E27FC236}">
-                <a16:creationId xmlns:a16="http://schemas.microsoft.com/office/drawing/2014/main" id="{906A6351-BF9E-8349-1C53-AC1857AFBED0}"/>
-              </a:ext>
-            </a:extLst>
-          </p:cNvPr>
-          <p:cNvSpPr txBox="1"/>
-          <p:nvPr/>
-        </p:nvSpPr>
-        <p:spPr>
-          <a:xfrm>
-            <a:off x="3604871" y="4204877"/>
-            <a:ext cx="3353796" cy="307777"/>
-          </a:xfrm>
-          <a:prstGeom prst="rect">
-            <a:avLst/>
-          </a:prstGeom>
-          <a:noFill/>
-        </p:spPr>
-        <p:txBody>
-          <a:bodyPr wrap="square">
-            <a:spAutoFit/>
-          </a:bodyPr>
-          <a:lstStyle/>
-          <a:p>
-            <a:pPr algn="ctr"/>
-            <a:r>
-              <a:rPr lang="en-US" altLang="ko-KR" sz="1400" spc="-50" dirty="0"/>
-              <a:t>&lt;</a:t>
-            </a:r>
-            <a:r>
-              <a:rPr lang="ko-KR" altLang="en-US" sz="1400" spc="-50" dirty="0" err="1"/>
-              <a:t>사회무차별곡선</a:t>
-            </a:r>
-            <a:r>
-              <a:rPr lang="en-US" altLang="ko-KR" sz="1400" spc="-50" dirty="0"/>
-              <a:t>: </a:t>
-            </a:r>
-            <a:r>
-              <a:rPr lang="ko-KR" altLang="en-US" sz="1400" spc="-50" dirty="0"/>
-              <a:t>공리주의적 가치판단</a:t>
-            </a:r>
-            <a:r>
-              <a:rPr lang="en-US" altLang="ko-KR" sz="1400" spc="-50" dirty="0"/>
-              <a:t>&gt;</a:t>
-            </a:r>
-            <a:endParaRPr lang="ko-KR" altLang="en-US" sz="1400" dirty="0"/>
-          </a:p>
-        </p:txBody>
-      </p:sp>
-      <p:pic>
-        <p:nvPicPr>
-          <p:cNvPr id="6" name="그림 5" descr="텍스트, 폰트, 라인, 도표이(가) 표시된 사진&#10;&#10;AI 생성 콘텐츠는 정확하지 않을 수 있습니다.">
-            <a:extLst>
-              <a:ext uri="{FF2B5EF4-FFF2-40B4-BE49-F238E27FC236}">
-                <a16:creationId xmlns:a16="http://schemas.microsoft.com/office/drawing/2014/main" id="{E8F11263-CE85-D185-A07A-DBEB37FC428B}"/>
-              </a:ext>
-            </a:extLst>
-          </p:cNvPr>
-          <p:cNvPicPr>
-            <a:picLocks noChangeAspect="1"/>
-          </p:cNvPicPr>
-          <p:nvPr/>
-        </p:nvPicPr>
-        <p:blipFill>
-          <a:blip r:embed="rId2"/>
-          <a:stretch>
-            <a:fillRect/>
-          </a:stretch>
-        </p:blipFill>
-        <p:spPr>
-          <a:xfrm>
-            <a:off x="4093829" y="4611126"/>
-            <a:ext cx="2676936" cy="2000774"/>
-          </a:xfrm>
-          <a:prstGeom prst="rect">
-            <a:avLst/>
-          </a:prstGeom>
-        </p:spPr>
-      </p:pic>
-    </p:spTree>
-    <p:extLst>
-      <p:ext uri="{BB962C8B-B14F-4D97-AF65-F5344CB8AC3E}">
-        <p14:creationId xmlns:p14="http://schemas.microsoft.com/office/powerpoint/2010/main" val="4005686573"/>
-      </p:ext>
-    </p:extLst>
-  </p:cSld>
-  <p:clrMapOvr>
-    <a:masterClrMapping/>
-  </p:clrMapOvr>
-</p:sld>
-</file>
-
-<file path=ppt/slides/slide31.xml><?xml version="1.0" encoding="utf-8"?>
-<p:sld xmlns:a="http://schemas.openxmlformats.org/drawingml/2006/main" xmlns:r="http://schemas.openxmlformats.org/officeDocument/2006/relationships" xmlns:p="http://schemas.openxmlformats.org/presentationml/2006/main">
-  <p:cSld>
-    <p:spTree>
-      <p:nvGrpSpPr>
-        <p:cNvPr id="1" name="">
-          <a:extLst>
-            <a:ext uri="{FF2B5EF4-FFF2-40B4-BE49-F238E27FC236}">
               <a16:creationId xmlns:a16="http://schemas.microsoft.com/office/drawing/2014/main" id="{6C3E700C-88F1-D757-D1E5-81FEB0913455}"/>
             </a:ext>
           </a:extLst>
@@ -18360,7 +17888,7 @@
           <a:p>
             <a:fld id="{109C872D-39A9-4065-8BF3-6A613116E2A1}" type="slidenum">
               <a:rPr lang="ko-KR" altLang="en-US" smtClean="0"/>
-              <a:t>31</a:t>
+              <a:t>30</a:t>
             </a:fld>
             <a:endParaRPr lang="ko-KR" altLang="en-US"/>
           </a:p>
@@ -18646,8 +18174,8 @@
           </a:p>
         </p:txBody>
       </p:sp>
-      <mc:AlternateContent xmlns:mc="http://schemas.openxmlformats.org/markup-compatibility/2006">
-        <mc:Choice xmlns:a14="http://schemas.microsoft.com/office/drawing/2010/main" Requires="a14">
+      <mc:AlternateContent xmlns:mc="http://schemas.openxmlformats.org/markup-compatibility/2006" xmlns:a14="http://schemas.microsoft.com/office/drawing/2010/main">
+        <mc:Choice Requires="a14">
           <p:sp>
             <p:nvSpPr>
               <p:cNvPr id="3" name="TextBox 2">
@@ -18784,7 +18312,7 @@
             </p:txBody>
           </p:sp>
         </mc:Choice>
-        <mc:Fallback>
+        <mc:Fallback xmlns="">
           <p:sp>
             <p:nvSpPr>
               <p:cNvPr id="3" name="TextBox 2">
@@ -18872,7 +18400,7 @@
 </p:sld>
 </file>
 
-<file path=ppt/slides/slide32.xml><?xml version="1.0" encoding="utf-8"?>
+<file path=ppt/slides/slide31.xml><?xml version="1.0" encoding="utf-8"?>
 <p:sld xmlns:a="http://schemas.openxmlformats.org/drawingml/2006/main" xmlns:r="http://schemas.openxmlformats.org/officeDocument/2006/relationships" xmlns:p="http://schemas.openxmlformats.org/presentationml/2006/main">
   <p:cSld>
     <p:spTree>
@@ -18946,14 +18474,14 @@
           <a:p>
             <a:fld id="{109C872D-39A9-4065-8BF3-6A613116E2A1}" type="slidenum">
               <a:rPr lang="ko-KR" altLang="en-US" smtClean="0"/>
-              <a:t>32</a:t>
+              <a:t>31</a:t>
             </a:fld>
             <a:endParaRPr lang="ko-KR" altLang="en-US"/>
           </a:p>
         </p:txBody>
       </p:sp>
-      <mc:AlternateContent xmlns:mc="http://schemas.openxmlformats.org/markup-compatibility/2006">
-        <mc:Choice xmlns:a14="http://schemas.microsoft.com/office/drawing/2010/main" Requires="a14">
+      <mc:AlternateContent xmlns:mc="http://schemas.openxmlformats.org/markup-compatibility/2006" xmlns:a14="http://schemas.microsoft.com/office/drawing/2010/main">
+        <mc:Choice Requires="a14">
           <p:sp>
             <p:nvSpPr>
               <p:cNvPr id="3" name="TextBox 2">
@@ -19190,7 +18718,7 @@
             </p:txBody>
           </p:sp>
         </mc:Choice>
-        <mc:Fallback>
+        <mc:Fallback xmlns="">
           <p:sp>
             <p:nvSpPr>
               <p:cNvPr id="3" name="TextBox 2">
@@ -19331,7 +18859,7 @@
 </p:sld>
 </file>
 
-<file path=ppt/slides/slide33.xml><?xml version="1.0" encoding="utf-8"?>
+<file path=ppt/slides/slide32.xml><?xml version="1.0" encoding="utf-8"?>
 <p:sld xmlns:a="http://schemas.openxmlformats.org/drawingml/2006/main" xmlns:r="http://schemas.openxmlformats.org/officeDocument/2006/relationships" xmlns:p="http://schemas.openxmlformats.org/presentationml/2006/main">
   <p:cSld>
     <p:spTree>
@@ -19405,7 +18933,7 @@
           <a:p>
             <a:fld id="{109C872D-39A9-4065-8BF3-6A613116E2A1}" type="slidenum">
               <a:rPr lang="ko-KR" altLang="en-US" smtClean="0"/>
-              <a:t>33</a:t>
+              <a:t>32</a:t>
             </a:fld>
             <a:endParaRPr lang="ko-KR" altLang="en-US"/>
           </a:p>
@@ -19787,7 +19315,7 @@
 </p:sld>
 </file>
 
-<file path=ppt/slides/slide34.xml><?xml version="1.0" encoding="utf-8"?>
+<file path=ppt/slides/slide33.xml><?xml version="1.0" encoding="utf-8"?>
 <p:sld xmlns:a="http://schemas.openxmlformats.org/drawingml/2006/main" xmlns:r="http://schemas.openxmlformats.org/officeDocument/2006/relationships" xmlns:p="http://schemas.openxmlformats.org/presentationml/2006/main">
   <p:cSld>
     <p:spTree>
@@ -19870,7 +19398,7 @@
           <a:p>
             <a:fld id="{109C872D-39A9-4065-8BF3-6A613116E2A1}" type="slidenum">
               <a:rPr lang="ko-KR" altLang="en-US" smtClean="0"/>
-              <a:t>34</a:t>
+              <a:t>33</a:t>
             </a:fld>
             <a:endParaRPr lang="ko-KR" altLang="en-US"/>
           </a:p>
@@ -19930,7 +19458,7 @@
 </p:sld>
 </file>
 
-<file path=ppt/slides/slide35.xml><?xml version="1.0" encoding="utf-8"?>
+<file path=ppt/slides/slide34.xml><?xml version="1.0" encoding="utf-8"?>
 <p:sld xmlns:a="http://schemas.openxmlformats.org/drawingml/2006/main" xmlns:r="http://schemas.openxmlformats.org/officeDocument/2006/relationships" xmlns:p="http://schemas.openxmlformats.org/presentationml/2006/main">
   <p:cSld>
     <p:spTree>
@@ -20004,14 +19532,14 @@
           <a:p>
             <a:fld id="{109C872D-39A9-4065-8BF3-6A613116E2A1}" type="slidenum">
               <a:rPr lang="ko-KR" altLang="en-US" smtClean="0"/>
-              <a:t>35</a:t>
+              <a:t>34</a:t>
             </a:fld>
             <a:endParaRPr lang="ko-KR" altLang="en-US"/>
           </a:p>
         </p:txBody>
       </p:sp>
-      <mc:AlternateContent xmlns:mc="http://schemas.openxmlformats.org/markup-compatibility/2006">
-        <mc:Choice xmlns:a14="http://schemas.microsoft.com/office/drawing/2010/main" Requires="a14">
+      <mc:AlternateContent xmlns:mc="http://schemas.openxmlformats.org/markup-compatibility/2006" xmlns:a14="http://schemas.microsoft.com/office/drawing/2010/main">
+        <mc:Choice Requires="a14">
           <p:sp>
             <p:nvSpPr>
               <p:cNvPr id="3" name="TextBox 2">
@@ -20370,7 +19898,7 @@
             </p:txBody>
           </p:sp>
         </mc:Choice>
-        <mc:Fallback>
+        <mc:Fallback xmlns="">
           <p:sp>
             <p:nvSpPr>
               <p:cNvPr id="3" name="TextBox 2">
@@ -20428,7 +19956,7 @@
 </p:sld>
 </file>
 
-<file path=ppt/slides/slide36.xml><?xml version="1.0" encoding="utf-8"?>
+<file path=ppt/slides/slide35.xml><?xml version="1.0" encoding="utf-8"?>
 <p:sld xmlns:a="http://schemas.openxmlformats.org/drawingml/2006/main" xmlns:r="http://schemas.openxmlformats.org/officeDocument/2006/relationships" xmlns:p="http://schemas.openxmlformats.org/presentationml/2006/main">
   <p:cSld>
     <p:spTree>
@@ -20556,7 +20084,7 @@
           <a:p>
             <a:fld id="{109C872D-39A9-4065-8BF3-6A613116E2A1}" type="slidenum">
               <a:rPr lang="ko-KR" altLang="en-US" smtClean="0"/>
-              <a:t>36</a:t>
+              <a:t>35</a:t>
             </a:fld>
             <a:endParaRPr lang="ko-KR" altLang="en-US"/>
           </a:p>
@@ -20717,7 +20245,7 @@
             </a:pPr>
             <a:r>
               <a:rPr lang="ko-KR" altLang="en-US" sz="1600" spc="-50" dirty="0"/>
-              <a:t>여기서 정책이란 하나의 경제적 상태를 다른 경제적 상태로 변화시키는 노력을 의미한다</a:t>
+              <a:t>여기서 정책이란 하나의 경제적 상태를 다른 경제적 상태로 변화시키려는 노력을 의미한다</a:t>
             </a:r>
             <a:r>
               <a:rPr lang="en-US" altLang="ko-KR" sz="1600" spc="-50" dirty="0"/>
@@ -21479,7 +21007,7 @@
         <p:spPr>
           <a:xfrm>
             <a:off x="288790" y="958844"/>
-            <a:ext cx="11693660" cy="3738011"/>
+            <a:ext cx="11693660" cy="4153509"/>
           </a:xfrm>
           <a:prstGeom prst="rect">
             <a:avLst/>
@@ -21603,6 +21131,24 @@
               <a:rPr lang="en-US" altLang="ko-KR" sz="1600" spc="-50" dirty="0"/>
               <a:t>.</a:t>
             </a:r>
+          </a:p>
+          <a:p>
+            <a:pPr>
+              <a:lnSpc>
+                <a:spcPct val="150000"/>
+              </a:lnSpc>
+            </a:pPr>
+            <a:r>
+              <a:rPr lang="ko-KR" altLang="en-US" u="sng" dirty="0">
+                <a:ln w="3175">
+                  <a:noFill/>
+                </a:ln>
+                <a:latin typeface="HY헤드라인M" panose="02030600000101010101" pitchFamily="18" charset="-127"/>
+                <a:ea typeface="HY헤드라인M" panose="02030600000101010101" pitchFamily="18" charset="-127"/>
+              </a:rPr>
+              <a:t>완전경쟁과 자원배분의 효율성</a:t>
+            </a:r>
+            <a:endParaRPr lang="en-US" altLang="ko-KR" sz="1600" spc="-50" dirty="0"/>
           </a:p>
           <a:p>
             <a:pPr marL="377825" indent="-285750">
@@ -21719,8 +21265,8 @@
         </p:blipFill>
         <p:spPr>
           <a:xfrm>
-            <a:off x="4355726" y="4509225"/>
-            <a:ext cx="2646207" cy="2070692"/>
+            <a:off x="4599007" y="4750087"/>
+            <a:ext cx="2460328" cy="1925239"/>
           </a:xfrm>
           <a:prstGeom prst="rect">
             <a:avLst/>

--- a/재정학/01_Lectures/재정학_Chapter_3.pptx
+++ b/재정학/01_Lectures/재정학_Chapter_3.pptx
@@ -253,7 +253,7 @@
           <a:p>
             <a:fld id="{4A5E00EF-AEA4-43E2-9451-8F9C59A39471}" type="datetimeFigureOut">
               <a:rPr lang="ko-KR" altLang="en-US" smtClean="0"/>
-              <a:t>2026-03-20</a:t>
+              <a:t>2026-03-22</a:t>
             </a:fld>
             <a:endParaRPr lang="ko-KR" altLang="en-US"/>
           </a:p>
@@ -675,7 +675,7 @@
           <a:p>
             <a:fld id="{CD32C56F-BD27-4999-9E6D-D4EACE3DA9F4}" type="datetime1">
               <a:rPr lang="ko-KR" altLang="en-US" smtClean="0"/>
-              <a:t>2026-03-20</a:t>
+              <a:t>2026-03-22</a:t>
             </a:fld>
             <a:endParaRPr lang="ko-KR" altLang="en-US"/>
           </a:p>
@@ -889,7 +889,7 @@
           <a:p>
             <a:fld id="{8EF4A19C-72C8-45CA-8E3F-68A7FA345D6C}" type="datetime1">
               <a:rPr lang="ko-KR" altLang="en-US" smtClean="0"/>
-              <a:t>2026-03-20</a:t>
+              <a:t>2026-03-22</a:t>
             </a:fld>
             <a:endParaRPr lang="ko-KR" altLang="en-US"/>
           </a:p>
@@ -1113,7 +1113,7 @@
           <a:p>
             <a:fld id="{56A175B2-010B-4341-954C-5F8F5C70B124}" type="datetime1">
               <a:rPr lang="ko-KR" altLang="en-US" smtClean="0"/>
-              <a:t>2026-03-20</a:t>
+              <a:t>2026-03-22</a:t>
             </a:fld>
             <a:endParaRPr lang="ko-KR" altLang="en-US"/>
           </a:p>
@@ -1327,7 +1327,7 @@
           <a:p>
             <a:fld id="{16B83F9E-22C9-45CA-9E85-070F1D3EF530}" type="datetime1">
               <a:rPr lang="ko-KR" altLang="en-US" smtClean="0"/>
-              <a:t>2026-03-20</a:t>
+              <a:t>2026-03-22</a:t>
             </a:fld>
             <a:endParaRPr lang="ko-KR" altLang="en-US"/>
           </a:p>
@@ -1618,7 +1618,7 @@
           <a:p>
             <a:fld id="{03278F45-FB3C-4C4D-B89A-7BC3F5F229F6}" type="datetime1">
               <a:rPr lang="ko-KR" altLang="en-US" smtClean="0"/>
-              <a:t>2026-03-20</a:t>
+              <a:t>2026-03-22</a:t>
             </a:fld>
             <a:endParaRPr lang="ko-KR" altLang="en-US"/>
           </a:p>
@@ -2011,7 +2011,7 @@
           <a:p>
             <a:fld id="{38FDAC3C-35A6-415C-9F03-738A6AC328B1}" type="datetime1">
               <a:rPr lang="ko-KR" altLang="en-US" smtClean="0"/>
-              <a:t>2026-03-20</a:t>
+              <a:t>2026-03-22</a:t>
             </a:fld>
             <a:endParaRPr lang="ko-KR" altLang="en-US"/>
           </a:p>
@@ -3605,7 +3605,7 @@
           <a:p>
             <a:fld id="{507A0DF1-AEE6-4B0D-89D2-351E7B3EF65C}" type="datetime1">
               <a:rPr lang="ko-KR" altLang="en-US" smtClean="0"/>
-              <a:t>2026-03-20</a:t>
+              <a:t>2026-03-22</a:t>
             </a:fld>
             <a:endParaRPr lang="ko-KR" altLang="en-US"/>
           </a:p>
@@ -4033,7 +4033,7 @@
           <a:p>
             <a:fld id="{CA93B8C9-630F-4D57-944D-04FD37CECCD3}" type="datetime1">
               <a:rPr lang="ko-KR" altLang="en-US" smtClean="0"/>
-              <a:t>2026-03-20</a:t>
+              <a:t>2026-03-22</a:t>
             </a:fld>
             <a:endParaRPr lang="ko-KR" altLang="en-US"/>
           </a:p>
@@ -4190,7 +4190,7 @@
           <a:p>
             <a:fld id="{E986165A-AC43-4902-9541-874ECD310BA3}" type="datetime1">
               <a:rPr lang="ko-KR" altLang="en-US" smtClean="0"/>
-              <a:t>2026-03-20</a:t>
+              <a:t>2026-03-22</a:t>
             </a:fld>
             <a:endParaRPr lang="ko-KR" altLang="en-US"/>
           </a:p>
@@ -4517,7 +4517,7 @@
           <a:p>
             <a:fld id="{47E6EE6D-2B0E-43A9-87A2-7354CDB998F4}" type="datetime1">
               <a:rPr lang="ko-KR" altLang="en-US" smtClean="0"/>
-              <a:t>2026-03-20</a:t>
+              <a:t>2026-03-22</a:t>
             </a:fld>
             <a:endParaRPr lang="ko-KR" altLang="en-US"/>
           </a:p>
@@ -4821,7 +4821,7 @@
           <a:p>
             <a:fld id="{5CC5944E-0BC8-4FAA-9F94-6B4B05834E10}" type="datetime1">
               <a:rPr lang="ko-KR" altLang="en-US" smtClean="0"/>
-              <a:t>2026-03-20</a:t>
+              <a:t>2026-03-22</a:t>
             </a:fld>
             <a:endParaRPr lang="ko-KR" altLang="en-US"/>
           </a:p>
@@ -18480,8 +18480,8 @@
           </a:p>
         </p:txBody>
       </p:sp>
-      <mc:AlternateContent xmlns:mc="http://schemas.openxmlformats.org/markup-compatibility/2006" xmlns:a14="http://schemas.microsoft.com/office/drawing/2010/main">
-        <mc:Choice Requires="a14">
+      <mc:AlternateContent xmlns:mc="http://schemas.openxmlformats.org/markup-compatibility/2006">
+        <mc:Choice xmlns:a14="http://schemas.microsoft.com/office/drawing/2010/main" Requires="a14">
           <p:sp>
             <p:nvSpPr>
               <p:cNvPr id="3" name="TextBox 2">
@@ -18648,7 +18648,7 @@
                 </a:r>
                 <a:r>
                   <a:rPr lang="en-US" altLang="ko-KR" sz="1600" spc="-50" dirty="0"/>
-                  <a:t>30</a:t>
+                  <a:t>29</a:t>
                 </a:r>
                 <a:r>
                   <a:rPr lang="ko-KR" altLang="en-US" sz="1600" spc="-50" dirty="0"/>
@@ -18718,7 +18718,7 @@
             </p:txBody>
           </p:sp>
         </mc:Choice>
-        <mc:Fallback xmlns="">
+        <mc:Fallback>
           <p:sp>
             <p:nvSpPr>
               <p:cNvPr id="3" name="TextBox 2">

--- a/재정학/01_Lectures/재정학_Chapter_3.pptx
+++ b/재정학/01_Lectures/재정학_Chapter_3.pptx
@@ -253,7 +253,7 @@
           <a:p>
             <a:fld id="{4A5E00EF-AEA4-43E2-9451-8F9C59A39471}" type="datetimeFigureOut">
               <a:rPr lang="ko-KR" altLang="en-US" smtClean="0"/>
-              <a:t>2026-03-22</a:t>
+              <a:t>2026-04-06</a:t>
             </a:fld>
             <a:endParaRPr lang="ko-KR" altLang="en-US"/>
           </a:p>
@@ -675,7 +675,7 @@
           <a:p>
             <a:fld id="{CD32C56F-BD27-4999-9E6D-D4EACE3DA9F4}" type="datetime1">
               <a:rPr lang="ko-KR" altLang="en-US" smtClean="0"/>
-              <a:t>2026-03-22</a:t>
+              <a:t>2026-04-06</a:t>
             </a:fld>
             <a:endParaRPr lang="ko-KR" altLang="en-US"/>
           </a:p>
@@ -889,7 +889,7 @@
           <a:p>
             <a:fld id="{8EF4A19C-72C8-45CA-8E3F-68A7FA345D6C}" type="datetime1">
               <a:rPr lang="ko-KR" altLang="en-US" smtClean="0"/>
-              <a:t>2026-03-22</a:t>
+              <a:t>2026-04-06</a:t>
             </a:fld>
             <a:endParaRPr lang="ko-KR" altLang="en-US"/>
           </a:p>
@@ -1113,7 +1113,7 @@
           <a:p>
             <a:fld id="{56A175B2-010B-4341-954C-5F8F5C70B124}" type="datetime1">
               <a:rPr lang="ko-KR" altLang="en-US" smtClean="0"/>
-              <a:t>2026-03-22</a:t>
+              <a:t>2026-04-06</a:t>
             </a:fld>
             <a:endParaRPr lang="ko-KR" altLang="en-US"/>
           </a:p>
@@ -1327,7 +1327,7 @@
           <a:p>
             <a:fld id="{16B83F9E-22C9-45CA-9E85-070F1D3EF530}" type="datetime1">
               <a:rPr lang="ko-KR" altLang="en-US" smtClean="0"/>
-              <a:t>2026-03-22</a:t>
+              <a:t>2026-04-06</a:t>
             </a:fld>
             <a:endParaRPr lang="ko-KR" altLang="en-US"/>
           </a:p>
@@ -1618,7 +1618,7 @@
           <a:p>
             <a:fld id="{03278F45-FB3C-4C4D-B89A-7BC3F5F229F6}" type="datetime1">
               <a:rPr lang="ko-KR" altLang="en-US" smtClean="0"/>
-              <a:t>2026-03-22</a:t>
+              <a:t>2026-04-06</a:t>
             </a:fld>
             <a:endParaRPr lang="ko-KR" altLang="en-US"/>
           </a:p>
@@ -2011,7 +2011,7 @@
           <a:p>
             <a:fld id="{38FDAC3C-35A6-415C-9F03-738A6AC328B1}" type="datetime1">
               <a:rPr lang="ko-KR" altLang="en-US" smtClean="0"/>
-              <a:t>2026-03-22</a:t>
+              <a:t>2026-04-06</a:t>
             </a:fld>
             <a:endParaRPr lang="ko-KR" altLang="en-US"/>
           </a:p>
@@ -3605,7 +3605,7 @@
           <a:p>
             <a:fld id="{507A0DF1-AEE6-4B0D-89D2-351E7B3EF65C}" type="datetime1">
               <a:rPr lang="ko-KR" altLang="en-US" smtClean="0"/>
-              <a:t>2026-03-22</a:t>
+              <a:t>2026-04-06</a:t>
             </a:fld>
             <a:endParaRPr lang="ko-KR" altLang="en-US"/>
           </a:p>
@@ -4033,7 +4033,7 @@
           <a:p>
             <a:fld id="{CA93B8C9-630F-4D57-944D-04FD37CECCD3}" type="datetime1">
               <a:rPr lang="ko-KR" altLang="en-US" smtClean="0"/>
-              <a:t>2026-03-22</a:t>
+              <a:t>2026-04-06</a:t>
             </a:fld>
             <a:endParaRPr lang="ko-KR" altLang="en-US"/>
           </a:p>
@@ -4190,7 +4190,7 @@
           <a:p>
             <a:fld id="{E986165A-AC43-4902-9541-874ECD310BA3}" type="datetime1">
               <a:rPr lang="ko-KR" altLang="en-US" smtClean="0"/>
-              <a:t>2026-03-22</a:t>
+              <a:t>2026-04-06</a:t>
             </a:fld>
             <a:endParaRPr lang="ko-KR" altLang="en-US"/>
           </a:p>
@@ -4517,7 +4517,7 @@
           <a:p>
             <a:fld id="{47E6EE6D-2B0E-43A9-87A2-7354CDB998F4}" type="datetime1">
               <a:rPr lang="ko-KR" altLang="en-US" smtClean="0"/>
-              <a:t>2026-03-22</a:t>
+              <a:t>2026-04-06</a:t>
             </a:fld>
             <a:endParaRPr lang="ko-KR" altLang="en-US"/>
           </a:p>
@@ -4821,7 +4821,7 @@
           <a:p>
             <a:fld id="{5CC5944E-0BC8-4FAA-9F94-6B4B05834E10}" type="datetime1">
               <a:rPr lang="ko-KR" altLang="en-US" smtClean="0"/>
-              <a:t>2026-03-22</a:t>
+              <a:t>2026-04-06</a:t>
             </a:fld>
             <a:endParaRPr lang="ko-KR" altLang="en-US"/>
           </a:p>
@@ -17617,7 +17617,7 @@
             </a:r>
             <a:r>
               <a:rPr lang="ko-KR" altLang="en-US" sz="1400" spc="-50" dirty="0"/>
-              <a:t>공리주의적 가치판단</a:t>
+              <a:t>평등주의적 가치판단</a:t>
             </a:r>
             <a:r>
               <a:rPr lang="en-US" altLang="ko-KR" sz="1400" spc="-50" dirty="0"/>
@@ -18163,8 +18163,12 @@
               <a:t>: </a:t>
             </a:r>
             <a:r>
+              <a:rPr lang="ko-KR" altLang="en-US" sz="1400" spc="-50" dirty="0" err="1"/>
+              <a:t>롤즈적</a:t>
+            </a:r>
+            <a:r>
               <a:rPr lang="ko-KR" altLang="en-US" sz="1400" spc="-50" dirty="0"/>
-              <a:t>공리주의적 가치판단</a:t>
+              <a:t> 가치판단</a:t>
             </a:r>
             <a:r>
               <a:rPr lang="en-US" altLang="ko-KR" sz="1400" spc="-50" dirty="0"/>
@@ -18480,8 +18484,8 @@
           </a:p>
         </p:txBody>
       </p:sp>
-      <mc:AlternateContent xmlns:mc="http://schemas.openxmlformats.org/markup-compatibility/2006">
-        <mc:Choice xmlns:a14="http://schemas.microsoft.com/office/drawing/2010/main" Requires="a14">
+      <mc:AlternateContent xmlns:mc="http://schemas.openxmlformats.org/markup-compatibility/2006" xmlns:a14="http://schemas.microsoft.com/office/drawing/2010/main">
+        <mc:Choice Requires="a14">
           <p:sp>
             <p:nvSpPr>
               <p:cNvPr id="3" name="TextBox 2">
@@ -18718,7 +18722,7 @@
             </p:txBody>
           </p:sp>
         </mc:Choice>
-        <mc:Fallback>
+        <mc:Fallback xmlns="">
           <p:sp>
             <p:nvSpPr>
               <p:cNvPr id="3" name="TextBox 2">
